--- a/aeza_hackathon_osen_2026.pptx
+++ b/aeza_hackathon_osen_2026.pptx
@@ -142,7 +142,7 @@
           </c:tx>
           <c:spPr>
             <a:solidFill>
-              <a:srgbClr val="F97415"/>
+              <a:srgbClr val="FF6B00"/>
             </a:solidFill>
           </c:spPr>
           <c:cat>
@@ -5004,7 +5004,7 @@
             <a:avLst/>
           </a:prstGeom>
           <a:solidFill>
-            <a:srgbClr val="F97415"/>
+            <a:srgbClr val="FF6B00"/>
           </a:solidFill>
           <a:ln>
             <a:noFill/>
@@ -5187,7 +5187,7 @@
             <a:r>
               <a:rPr sz="4400" b="1" i="0">
                 <a:solidFill>
-                  <a:srgbClr val="F97415"/>
+                  <a:srgbClr val="FF6B00"/>
                 </a:solidFill>
                 <a:latin typeface="Manrope"/>
                 <a:cs typeface="Manrope"/>
@@ -5831,7 +5831,7 @@
             <a:avLst/>
           </a:prstGeom>
           <a:solidFill>
-            <a:srgbClr val="F97415"/>
+            <a:srgbClr val="FF6B00"/>
           </a:solidFill>
           <a:ln>
             <a:noFill/>
@@ -6014,7 +6014,7 @@
             <a:r>
               <a:rPr sz="2500" b="1" i="0">
                 <a:solidFill>
-                  <a:srgbClr val="F97415"/>
+                  <a:srgbClr val="FF6B00"/>
                 </a:solidFill>
                 <a:latin typeface="Manrope SemiBold"/>
                 <a:cs typeface="Manrope SemiBold"/>
@@ -6038,7 +6038,7 @@
             <a:r>
               <a:rPr sz="2500" b="1" i="0">
                 <a:solidFill>
-                  <a:srgbClr val="F97415"/>
+                  <a:srgbClr val="FF6B00"/>
                 </a:solidFill>
                 <a:latin typeface="Manrope SemiBold"/>
                 <a:cs typeface="Manrope SemiBold"/>
@@ -7054,7 +7054,7 @@
             <a:r>
               <a:rPr sz="1050" b="1" i="0" spc="140">
                 <a:solidFill>
-                  <a:srgbClr val="B34A0A"/>
+                  <a:srgbClr val="B84A00"/>
                 </a:solidFill>
                 <a:latin typeface="Manrope"/>
                 <a:cs typeface="Manrope"/>
@@ -7926,7 +7926,7 @@
             <a:avLst/>
           </a:prstGeom>
           <a:solidFill>
-            <a:srgbClr val="B34A0A"/>
+            <a:srgbClr val="B84A00"/>
           </a:solidFill>
           <a:ln>
             <a:noFill/>
@@ -7970,7 +7970,7 @@
             <a:avLst/>
           </a:prstGeom>
           <a:solidFill>
-            <a:srgbClr val="B34A0A"/>
+            <a:srgbClr val="B84A00"/>
           </a:solidFill>
           <a:ln>
             <a:noFill/>
@@ -8386,7 +8386,7 @@
             <a:r>
               <a:rPr sz="2500" b="1" i="0">
                 <a:solidFill>
-                  <a:srgbClr val="B34A0A"/>
+                  <a:srgbClr val="B84A00"/>
                 </a:solidFill>
                 <a:latin typeface="Manrope"/>
                 <a:cs typeface="Manrope"/>
@@ -8524,7 +8524,7 @@
             <a:r>
               <a:rPr sz="2500" b="1" i="0">
                 <a:solidFill>
-                  <a:srgbClr val="B34A0A"/>
+                  <a:srgbClr val="B84A00"/>
                 </a:solidFill>
                 <a:latin typeface="Manrope"/>
                 <a:cs typeface="Manrope"/>
@@ -8662,7 +8662,7 @@
             <a:r>
               <a:rPr sz="2500" b="1" i="0">
                 <a:solidFill>
-                  <a:srgbClr val="B34A0A"/>
+                  <a:srgbClr val="B84A00"/>
                 </a:solidFill>
                 <a:latin typeface="Manrope"/>
                 <a:cs typeface="Manrope"/>
@@ -8800,7 +8800,7 @@
             <a:r>
               <a:rPr sz="2500" b="1" i="0">
                 <a:solidFill>
-                  <a:srgbClr val="B34A0A"/>
+                  <a:srgbClr val="B84A00"/>
                 </a:solidFill>
                 <a:latin typeface="Manrope"/>
                 <a:cs typeface="Manrope"/>
@@ -9047,7 +9047,7 @@
             <a:r>
               <a:rPr sz="1050" b="1" i="0" spc="140">
                 <a:solidFill>
-                  <a:srgbClr val="B34A0A"/>
+                  <a:srgbClr val="B84A00"/>
                 </a:solidFill>
                 <a:latin typeface="Manrope"/>
                 <a:cs typeface="Manrope"/>
@@ -9191,7 +9191,7 @@
             <a:avLst/>
           </a:prstGeom>
           <a:solidFill>
-            <a:srgbClr val="F97415"/>
+            <a:srgbClr val="FF6B00"/>
           </a:solidFill>
           <a:ln>
             <a:noFill/>
@@ -9374,7 +9374,7 @@
             <a:avLst/>
           </a:prstGeom>
           <a:solidFill>
-            <a:srgbClr val="F97415"/>
+            <a:srgbClr val="FF6B00"/>
           </a:solidFill>
           <a:ln>
             <a:noFill/>
@@ -9533,7 +9533,7 @@
             <a:avLst/>
           </a:prstGeom>
           <a:solidFill>
-            <a:srgbClr val="F97415"/>
+            <a:srgbClr val="FF6B00"/>
           </a:solidFill>
           <a:ln>
             <a:noFill/>
@@ -9692,7 +9692,7 @@
             <a:avLst/>
           </a:prstGeom>
           <a:solidFill>
-            <a:srgbClr val="F97415"/>
+            <a:srgbClr val="FF6B00"/>
           </a:solidFill>
           <a:ln>
             <a:noFill/>
@@ -9892,7 +9892,7 @@
         <p:spPr>
           <a:xfrm>
             <a:off x="626364" y="3012948"/>
-            <a:ext cx="6556248" cy="2029745"/>
+            <a:ext cx="6556248" cy="2418059"/>
           </a:xfrm>
           <a:prstGeom prst="rect">
             <a:avLst/>
@@ -9946,7 +9946,7 @@
         <p:spPr>
           <a:xfrm>
             <a:off x="658368" y="3044952"/>
-            <a:ext cx="6486932" cy="1965737"/>
+            <a:ext cx="6487678" cy="2354051"/>
           </a:xfrm>
           <a:prstGeom prst="rect">
             <a:avLst/>
@@ -9961,7 +9961,7 @@
         </p:nvSpPr>
         <p:spPr>
           <a:xfrm>
-            <a:off x="658368" y="5120417"/>
+            <a:off x="658368" y="5508731"/>
             <a:ext cx="6492240" cy="180848"/>
           </a:xfrm>
           <a:prstGeom prst="rect">
@@ -10056,7 +10056,7 @@
         <p:spPr>
           <a:xfrm>
             <a:off x="7392924" y="3012948"/>
-            <a:ext cx="4172407" cy="1137622"/>
+            <a:ext cx="4172407" cy="1346239"/>
           </a:xfrm>
           <a:prstGeom prst="rect">
             <a:avLst/>
@@ -10095,7 +10095,7 @@
       </p:sp>
       <p:pic>
         <p:nvPicPr>
-          <p:cNvPr id="24" name="Picture 23" descr="w_dash_metrics.png"/>
+          <p:cNvPr id="24" name="Picture 23" descr="w_dash_metrics6.png"/>
           <p:cNvPicPr>
             <a:picLocks noChangeAspect="1"/>
           </p:cNvPicPr>
@@ -10110,7 +10110,7 @@
         <p:spPr>
           <a:xfrm>
             <a:off x="7424928" y="3044952"/>
-            <a:ext cx="4108399" cy="1073609"/>
+            <a:ext cx="4093728" cy="1282231"/>
           </a:xfrm>
           <a:prstGeom prst="rect">
             <a:avLst/>
@@ -10125,8 +10125,8 @@
         </p:nvSpPr>
         <p:spPr>
           <a:xfrm>
-            <a:off x="7392924" y="4287730"/>
-            <a:ext cx="4172407" cy="1125993"/>
+            <a:off x="7392924" y="4496347"/>
+            <a:ext cx="4172407" cy="1297724"/>
           </a:xfrm>
           <a:prstGeom prst="rect">
             <a:avLst/>
@@ -10179,8 +10179,8 @@
         </p:blipFill>
         <p:spPr>
           <a:xfrm>
-            <a:off x="7424928" y="4319734"/>
-            <a:ext cx="4108399" cy="1061982"/>
+            <a:off x="7424928" y="4528351"/>
+            <a:ext cx="4101909" cy="1233716"/>
           </a:xfrm>
           <a:prstGeom prst="rect">
             <a:avLst/>
@@ -10195,7 +10195,7 @@
         </p:nvSpPr>
         <p:spPr>
           <a:xfrm>
-            <a:off x="7424928" y="5491447"/>
+            <a:off x="7424928" y="5871795"/>
             <a:ext cx="4108399" cy="343408"/>
           </a:xfrm>
           <a:prstGeom prst="rect">
@@ -10356,7 +10356,7 @@
             <a:r>
               <a:rPr sz="1050" b="1" i="0" spc="140">
                 <a:solidFill>
-                  <a:srgbClr val="B34A0A"/>
+                  <a:srgbClr val="B84A00"/>
                 </a:solidFill>
                 <a:latin typeface="Manrope"/>
                 <a:cs typeface="Manrope"/>
@@ -10642,7 +10642,7 @@
             </a:avLst>
           </a:prstGeom>
           <a:solidFill>
-            <a:srgbClr val="B34A0A"/>
+            <a:srgbClr val="B84A00"/>
           </a:solidFill>
           <a:ln>
             <a:noFill/>
@@ -10775,7 +10775,7 @@
             <a:r>
               <a:rPr sz="1400" b="1" i="0">
                 <a:solidFill>
-                  <a:srgbClr val="B34A0A"/>
+                  <a:srgbClr val="B84A00"/>
                 </a:solidFill>
                 <a:latin typeface="Manrope SemiBold"/>
                 <a:cs typeface="Manrope SemiBold"/>
@@ -11218,7 +11218,7 @@
         <p:spPr>
           <a:xfrm>
             <a:off x="4759452" y="2263140"/>
-            <a:ext cx="6805879" cy="303522"/>
+            <a:ext cx="6805879" cy="410011"/>
           </a:xfrm>
           <a:prstGeom prst="rect">
             <a:avLst/>
@@ -11272,7 +11272,7 @@
         <p:spPr>
           <a:xfrm>
             <a:off x="4791456" y="2295144"/>
-            <a:ext cx="6741871" cy="239513"/>
+            <a:ext cx="6671647" cy="346003"/>
           </a:xfrm>
           <a:prstGeom prst="rect">
             <a:avLst/>
@@ -11287,8 +11287,8 @@
         </p:nvSpPr>
         <p:spPr>
           <a:xfrm>
-            <a:off x="4759452" y="2612382"/>
-            <a:ext cx="3361791" cy="1024005"/>
+            <a:off x="4759452" y="2718871"/>
+            <a:ext cx="3361791" cy="1250858"/>
           </a:xfrm>
           <a:prstGeom prst="rect">
             <a:avLst/>
@@ -11341,8 +11341,8 @@
         </p:blipFill>
         <p:spPr>
           <a:xfrm>
-            <a:off x="4791456" y="2644386"/>
-            <a:ext cx="3297767" cy="959997"/>
+            <a:off x="4791456" y="2750875"/>
+            <a:ext cx="3297783" cy="1186839"/>
           </a:xfrm>
           <a:prstGeom prst="rect">
             <a:avLst/>
@@ -11357,8 +11357,8 @@
         </p:nvSpPr>
         <p:spPr>
           <a:xfrm>
-            <a:off x="8203539" y="2612382"/>
-            <a:ext cx="3361791" cy="1024005"/>
+            <a:off x="8203539" y="2718871"/>
+            <a:ext cx="3361791" cy="1250858"/>
           </a:xfrm>
           <a:prstGeom prst="rect">
             <a:avLst/>
@@ -11411,8 +11411,8 @@
         </p:blipFill>
         <p:spPr>
           <a:xfrm>
-            <a:off x="8235543" y="2644386"/>
-            <a:ext cx="3297767" cy="959997"/>
+            <a:off x="8235543" y="2750875"/>
+            <a:ext cx="3297783" cy="1186839"/>
           </a:xfrm>
           <a:prstGeom prst="rect">
             <a:avLst/>
@@ -11427,7 +11427,7 @@
         </p:nvSpPr>
         <p:spPr>
           <a:xfrm>
-            <a:off x="4791456" y="3842127"/>
+            <a:off x="4791456" y="4175469"/>
             <a:ext cx="6741871" cy="151003"/>
           </a:xfrm>
           <a:prstGeom prst="rect">
@@ -11474,8 +11474,8 @@
         </p:nvSpPr>
         <p:spPr>
           <a:xfrm>
-            <a:off x="4759452" y="4057011"/>
-            <a:ext cx="6805879" cy="1336059"/>
+            <a:off x="4759452" y="4390353"/>
+            <a:ext cx="6805879" cy="1513779"/>
           </a:xfrm>
           <a:prstGeom prst="rect">
             <a:avLst/>
@@ -11528,8 +11528,8 @@
         </p:blipFill>
         <p:spPr>
           <a:xfrm>
-            <a:off x="4791456" y="4089015"/>
-            <a:ext cx="6741871" cy="1272051"/>
+            <a:off x="4791456" y="4422357"/>
+            <a:ext cx="6697172" cy="1449771"/>
           </a:xfrm>
           <a:prstGeom prst="rect">
             <a:avLst/>
@@ -11544,7 +11544,7 @@
         </p:nvSpPr>
         <p:spPr>
           <a:xfrm>
-            <a:off x="4791456" y="5470794"/>
+            <a:off x="4791456" y="5981856"/>
             <a:ext cx="6741871" cy="364998"/>
           </a:xfrm>
           <a:prstGeom prst="rect">
@@ -11796,7 +11796,7 @@
             <a:r>
               <a:rPr sz="1050" b="1" i="0" spc="140">
                 <a:solidFill>
-                  <a:srgbClr val="B34A0A"/>
+                  <a:srgbClr val="B84A00"/>
                 </a:solidFill>
                 <a:latin typeface="Manrope"/>
                 <a:cs typeface="Manrope"/>
@@ -12513,7 +12513,7 @@
             <a:avLst/>
           </a:prstGeom>
           <a:solidFill>
-            <a:srgbClr val="B34A0A"/>
+            <a:srgbClr val="B84A00"/>
           </a:solidFill>
           <a:ln>
             <a:noFill/>
@@ -12897,7 +12897,7 @@
             <a:r>
               <a:rPr sz="1050" b="1" i="0" spc="140">
                 <a:solidFill>
-                  <a:srgbClr val="B34A0A"/>
+                  <a:srgbClr val="B84A00"/>
                 </a:solidFill>
                 <a:latin typeface="Manrope"/>
                 <a:cs typeface="Manrope"/>
@@ -13375,7 +13375,7 @@
             <a:r>
               <a:rPr sz="1350" b="1" i="0">
                 <a:solidFill>
-                  <a:srgbClr val="B34A0A"/>
+                  <a:srgbClr val="B84A00"/>
                 </a:solidFill>
                 <a:latin typeface="Manrope SemiBold"/>
                 <a:cs typeface="Manrope SemiBold"/>
@@ -13818,7 +13818,7 @@
         <p:spPr>
           <a:xfrm>
             <a:off x="4878323" y="3323844"/>
-            <a:ext cx="6687008" cy="1307592"/>
+            <a:ext cx="6687008" cy="1462829"/>
           </a:xfrm>
           <a:prstGeom prst="rect">
             <a:avLst/>
@@ -13872,7 +13872,7 @@
         <p:spPr>
           <a:xfrm>
             <a:off x="4910327" y="3355848"/>
-            <a:ext cx="6623000" cy="1210084"/>
+            <a:ext cx="6615883" cy="1398821"/>
           </a:xfrm>
           <a:prstGeom prst="rect">
             <a:avLst/>
@@ -14008,7 +14008,7 @@
             <a:r>
               <a:rPr sz="1600" b="1" i="0">
                 <a:solidFill>
-                  <a:srgbClr val="B34A0A"/>
+                  <a:srgbClr val="B84A00"/>
                 </a:solidFill>
                 <a:latin typeface="Manrope"/>
                 <a:cs typeface="Manrope"/>
@@ -14629,7 +14629,7 @@
             <a:r>
               <a:rPr sz="1050" b="1" i="0" spc="140">
                 <a:solidFill>
-                  <a:srgbClr val="B34A0A"/>
+                  <a:srgbClr val="B84A00"/>
                 </a:solidFill>
                 <a:latin typeface="Manrope"/>
                 <a:cs typeface="Manrope"/>
@@ -14819,7 +14819,7 @@
             <a:avLst/>
           </a:prstGeom>
           <a:solidFill>
-            <a:srgbClr val="B34A0A"/>
+            <a:srgbClr val="B84A00"/>
           </a:solidFill>
           <a:ln>
             <a:noFill/>
@@ -14884,7 +14884,7 @@
             <a:r>
               <a:rPr sz="1100" b="1">
                 <a:solidFill>
-                  <a:srgbClr val="B34A0A"/>
+                  <a:srgbClr val="B84A00"/>
                 </a:solidFill>
                 <a:latin typeface="Manrope"/>
                 <a:cs typeface="Manrope"/>
@@ -14989,7 +14989,7 @@
             <a:r>
               <a:rPr sz="950" b="1" i="0">
                 <a:solidFill>
-                  <a:srgbClr val="B34A0A"/>
+                  <a:srgbClr val="B84A00"/>
                 </a:solidFill>
                 <a:latin typeface="Manrope"/>
                 <a:cs typeface="Manrope"/>
@@ -15009,7 +15009,7 @@
         <p:spPr>
           <a:xfrm>
             <a:off x="626364" y="2921508"/>
-            <a:ext cx="5346039" cy="827594"/>
+            <a:ext cx="5346039" cy="1978550"/>
           </a:xfrm>
           <a:prstGeom prst="rect">
             <a:avLst/>
@@ -15063,7 +15063,7 @@
         <p:spPr>
           <a:xfrm>
             <a:off x="658368" y="2953512"/>
-            <a:ext cx="5282031" cy="763582"/>
+            <a:ext cx="5282031" cy="1900950"/>
           </a:xfrm>
           <a:prstGeom prst="rect">
             <a:avLst/>
@@ -15079,7 +15079,7 @@
         <p:spPr>
           <a:xfrm>
             <a:off x="6219291" y="2921508"/>
-            <a:ext cx="5346039" cy="827594"/>
+            <a:ext cx="5346039" cy="1978550"/>
           </a:xfrm>
           <a:prstGeom prst="rect">
             <a:avLst/>
@@ -15133,7 +15133,7 @@
         <p:spPr>
           <a:xfrm>
             <a:off x="6251295" y="2953512"/>
-            <a:ext cx="5282031" cy="763582"/>
+            <a:ext cx="5282031" cy="1900950"/>
           </a:xfrm>
           <a:prstGeom prst="rect">
             <a:avLst/>
@@ -15291,7 +15291,7 @@
             <a:r>
               <a:rPr sz="1500" b="1">
                 <a:solidFill>
-                  <a:srgbClr val="B34A0A"/>
+                  <a:srgbClr val="B84A00"/>
                 </a:solidFill>
                 <a:latin typeface="Manrope"/>
                 <a:cs typeface="Manrope"/>
@@ -15453,7 +15453,7 @@
             <a:r>
               <a:rPr sz="1500" b="1">
                 <a:solidFill>
-                  <a:srgbClr val="B34A0A"/>
+                  <a:srgbClr val="B84A00"/>
                 </a:solidFill>
                 <a:latin typeface="Manrope"/>
                 <a:cs typeface="Manrope"/>
@@ -15615,7 +15615,7 @@
             <a:r>
               <a:rPr sz="1500" b="1">
                 <a:solidFill>
-                  <a:srgbClr val="B34A0A"/>
+                  <a:srgbClr val="B84A00"/>
                 </a:solidFill>
                 <a:latin typeface="Manrope"/>
                 <a:cs typeface="Manrope"/>
@@ -15777,7 +15777,7 @@
             <a:r>
               <a:rPr sz="1500" b="1">
                 <a:solidFill>
-                  <a:srgbClr val="B34A0A"/>
+                  <a:srgbClr val="B84A00"/>
                 </a:solidFill>
                 <a:latin typeface="Manrope"/>
                 <a:cs typeface="Manrope"/>
@@ -15939,7 +15939,7 @@
             <a:r>
               <a:rPr sz="1500" b="1">
                 <a:solidFill>
-                  <a:srgbClr val="B34A0A"/>
+                  <a:srgbClr val="B84A00"/>
                 </a:solidFill>
                 <a:latin typeface="Manrope"/>
                 <a:cs typeface="Manrope"/>
@@ -16101,7 +16101,7 @@
             <a:r>
               <a:rPr sz="1500" b="1">
                 <a:solidFill>
-                  <a:srgbClr val="B34A0A"/>
+                  <a:srgbClr val="B84A00"/>
                 </a:solidFill>
                 <a:latin typeface="Manrope"/>
                 <a:cs typeface="Manrope"/>
@@ -16281,7 +16281,7 @@
             <a:r>
               <a:rPr sz="1050" b="1" i="0" spc="140">
                 <a:solidFill>
-                  <a:srgbClr val="B34A0A"/>
+                  <a:srgbClr val="B84A00"/>
                 </a:solidFill>
                 <a:latin typeface="Manrope"/>
                 <a:cs typeface="Manrope"/>
@@ -17279,7 +17279,7 @@
             <a:avLst/>
           </a:prstGeom>
           <a:solidFill>
-            <a:srgbClr val="B34A0A"/>
+            <a:srgbClr val="B84A00"/>
           </a:solidFill>
           <a:ln>
             <a:noFill/>
@@ -17615,7 +17615,7 @@
             <a:r>
               <a:rPr sz="1050" b="1" i="0" spc="140">
                 <a:solidFill>
-                  <a:srgbClr val="B34A0A"/>
+                  <a:srgbClr val="B84A00"/>
                 </a:solidFill>
                 <a:latin typeface="Manrope"/>
                 <a:cs typeface="Manrope"/>
@@ -18537,7 +18537,7 @@
             <a:avLst/>
           </a:prstGeom>
           <a:solidFill>
-            <a:srgbClr val="B34A0A"/>
+            <a:srgbClr val="B84A00"/>
           </a:solidFill>
           <a:ln>
             <a:noFill/>

--- a/aeza_hackathon_osen_2026.pptx
+++ b/aeza_hackathon_osen_2026.pptx
@@ -7159,7 +7159,7 @@
                 <a:ea typeface="Inter"/>
                 <a:cs typeface="Inter"/>
               </a:rPr>
-              <a:t>73.3</a:t>
+              <a:t>71.4</a:t>
             </a:r>
           </a:p>
         </p:txBody>
@@ -7391,7 +7391,7 @@
                 <a:ea typeface="Inter"/>
                 <a:cs typeface="Inter"/>
               </a:rPr>
-              <a:t>1 услуга</a:t>
+              <a:t>2 услуги</a:t>
             </a:r>
             <a:r>
               <a:rPr sz="1250" b="0">
@@ -7542,7 +7542,7 @@
                 <a:ea typeface="Inter"/>
                 <a:cs typeface="Inter"/>
               </a:rPr>
-              <a:t>Идентификатор клиента взят из датасета; адрес не показываем. Критичная услуга — service-0030: 73.3 балла, стоимость продления 7,02 €.</a:t>
+              <a:t>Идентификатор клиента взят из датасета; адрес не показываем. Критичная услуга — service-0030: 71.4 балла, стоимость продления 7,02 €.</a:t>
             </a:r>
           </a:p>
         </p:txBody>
@@ -8611,7 +8611,7 @@
                 <a:ea typeface="Inter"/>
                 <a:cs typeface="Inter"/>
               </a:rPr>
-              <a:t>вес 2</a:t>
+              <a:t>вес 0</a:t>
             </a:r>
           </a:p>
         </p:txBody>
@@ -8660,14 +8660,488 @@
       </p:sp>
       <p:sp>
         <p:nvSpPr>
-          <p:cNvPr id="29" name="Rectangle 28"/>
+          <p:cNvPr id="29" name="TextBox 28"/>
+          <p:cNvSpPr txBox="1"/>
+          <p:nvPr/>
+        </p:nvSpPr>
+        <p:spPr>
+          <a:xfrm>
+            <a:off x="6675120" y="4453128"/>
+            <a:ext cx="868680" cy="310896"/>
+          </a:xfrm>
+          <a:prstGeom prst="rect">
+            <a:avLst/>
+          </a:prstGeom>
+          <a:noFill/>
+        </p:spPr>
+        <p:txBody>
+          <a:bodyPr wrap="square" anchor="t" lIns="0" rIns="0" tIns="0" bIns="0">
+            <a:spAutoFit/>
+          </a:bodyPr>
+          <a:lstStyle/>
+          <a:p>
+            <a:pPr algn="r"/>
+            <a:r>
+              <a:rPr sz="1250" b="1" i="0">
+                <a:solidFill>
+                  <a:srgbClr val="202B3A"/>
+                </a:solidFill>
+                <a:latin typeface="Inter"/>
+                <a:ea typeface="Inter"/>
+                <a:cs typeface="Inter"/>
+              </a:rPr>
+              <a:t>0.0</a:t>
+            </a:r>
+          </a:p>
+        </p:txBody>
+      </p:sp>
+      <p:sp>
+        <p:nvSpPr>
+          <p:cNvPr id="30" name="TextBox 29"/>
+          <p:cNvSpPr txBox="1"/>
+          <p:nvPr/>
+        </p:nvSpPr>
+        <p:spPr>
+          <a:xfrm>
+            <a:off x="777240" y="4873752"/>
+            <a:ext cx="3035808" cy="310896"/>
+          </a:xfrm>
+          <a:prstGeom prst="rect">
+            <a:avLst/>
+          </a:prstGeom>
+          <a:noFill/>
+        </p:spPr>
+        <p:txBody>
+          <a:bodyPr wrap="square" anchor="t" lIns="0" rIns="0" tIns="0" bIns="0">
+            <a:spAutoFit/>
+          </a:bodyPr>
+          <a:lstStyle/>
+          <a:p>
+            <a:pPr algn="l"/>
+            <a:r>
+              <a:rPr sz="1200" b="1" i="0">
+                <a:solidFill>
+                  <a:srgbClr val="202B3A"/>
+                </a:solidFill>
+                <a:latin typeface="Inter"/>
+                <a:ea typeface="Inter"/>
+                <a:cs typeface="Inter"/>
+              </a:rPr>
+              <a:t>Услуга приостановлена</a:t>
+            </a:r>
+          </a:p>
+        </p:txBody>
+      </p:sp>
+      <p:sp>
+        <p:nvSpPr>
+          <p:cNvPr id="31" name="TextBox 30"/>
+          <p:cNvSpPr txBox="1"/>
+          <p:nvPr/>
+        </p:nvSpPr>
+        <p:spPr>
+          <a:xfrm>
+            <a:off x="3849624" y="4873752"/>
+            <a:ext cx="1170432" cy="310896"/>
+          </a:xfrm>
+          <a:prstGeom prst="rect">
+            <a:avLst/>
+          </a:prstGeom>
+          <a:noFill/>
+        </p:spPr>
+        <p:txBody>
+          <a:bodyPr wrap="square" anchor="t" lIns="0" rIns="0" tIns="0" bIns="0">
+            <a:spAutoFit/>
+          </a:bodyPr>
+          <a:lstStyle/>
+          <a:p>
+            <a:pPr algn="r"/>
+            <a:r>
+              <a:rPr sz="1150" b="0" i="0">
+                <a:solidFill>
+                  <a:srgbClr val="6B7480"/>
+                </a:solidFill>
+                <a:latin typeface="Inter"/>
+                <a:ea typeface="Inter"/>
+                <a:cs typeface="Inter"/>
+              </a:rPr>
+              <a:t>вес 1</a:t>
+            </a:r>
+          </a:p>
+        </p:txBody>
+      </p:sp>
+      <p:sp>
+        <p:nvSpPr>
+          <p:cNvPr id="32" name="Rectangle 31"/>
           <p:cNvSpPr/>
           <p:nvPr/>
         </p:nvSpPr>
         <p:spPr>
           <a:xfrm>
-            <a:off x="5166360" y="4498848"/>
-            <a:ext cx="944880" cy="118872"/>
+            <a:off x="5166360" y="4919472"/>
+            <a:ext cx="1417320" cy="118872"/>
+          </a:xfrm>
+          <a:prstGeom prst="rect">
+            <a:avLst/>
+          </a:prstGeom>
+          <a:solidFill>
+            <a:srgbClr val="D9DEE2"/>
+          </a:solidFill>
+          <a:ln>
+            <a:noFill/>
+          </a:ln>
+          <a:effectLst/>
+        </p:spPr>
+        <p:style>
+          <a:lnRef idx="1">
+            <a:schemeClr val="accent1"/>
+          </a:lnRef>
+          <a:fillRef idx="3">
+            <a:schemeClr val="accent1"/>
+          </a:fillRef>
+          <a:effectRef idx="2">
+            <a:schemeClr val="accent1"/>
+          </a:effectRef>
+          <a:fontRef idx="minor">
+            <a:schemeClr val="lt1"/>
+          </a:fontRef>
+        </p:style>
+        <p:txBody>
+          <a:bodyPr rtlCol="0" anchor="ctr"/>
+          <a:lstStyle/>
+          <a:p/>
+        </p:txBody>
+      </p:sp>
+      <p:sp>
+        <p:nvSpPr>
+          <p:cNvPr id="33" name="TextBox 32"/>
+          <p:cNvSpPr txBox="1"/>
+          <p:nvPr/>
+        </p:nvSpPr>
+        <p:spPr>
+          <a:xfrm>
+            <a:off x="6675120" y="4873752"/>
+            <a:ext cx="868680" cy="310896"/>
+          </a:xfrm>
+          <a:prstGeom prst="rect">
+            <a:avLst/>
+          </a:prstGeom>
+          <a:noFill/>
+        </p:spPr>
+        <p:txBody>
+          <a:bodyPr wrap="square" anchor="t" lIns="0" rIns="0" tIns="0" bIns="0">
+            <a:spAutoFit/>
+          </a:bodyPr>
+          <a:lstStyle/>
+          <a:p>
+            <a:pPr algn="r"/>
+            <a:r>
+              <a:rPr sz="1250" b="1" i="0">
+                <a:solidFill>
+                  <a:srgbClr val="202B3A"/>
+                </a:solidFill>
+                <a:latin typeface="Inter"/>
+                <a:ea typeface="Inter"/>
+                <a:cs typeface="Inter"/>
+              </a:rPr>
+              <a:t>0.0</a:t>
+            </a:r>
+          </a:p>
+        </p:txBody>
+      </p:sp>
+      <p:sp>
+        <p:nvSpPr>
+          <p:cNvPr id="34" name="TextBox 33"/>
+          <p:cNvSpPr txBox="1"/>
+          <p:nvPr/>
+        </p:nvSpPr>
+        <p:spPr>
+          <a:xfrm>
+            <a:off x="777240" y="5294376"/>
+            <a:ext cx="3035808" cy="310896"/>
+          </a:xfrm>
+          <a:prstGeom prst="rect">
+            <a:avLst/>
+          </a:prstGeom>
+          <a:noFill/>
+        </p:spPr>
+        <p:txBody>
+          <a:bodyPr wrap="square" anchor="t" lIns="0" rIns="0" tIns="0" bIns="0">
+            <a:spAutoFit/>
+          </a:bodyPr>
+          <a:lstStyle/>
+          <a:p>
+            <a:pPr algn="l"/>
+            <a:r>
+              <a:rPr sz="1200" b="1" i="0">
+                <a:solidFill>
+                  <a:srgbClr val="202B3A"/>
+                </a:solidFill>
+                <a:latin typeface="Inter"/>
+                <a:ea typeface="Inter"/>
+                <a:cs typeface="Inter"/>
+              </a:rPr>
+              <a:t>Доля неуспешных продлений</a:t>
+            </a:r>
+          </a:p>
+        </p:txBody>
+      </p:sp>
+      <p:sp>
+        <p:nvSpPr>
+          <p:cNvPr id="35" name="TextBox 34"/>
+          <p:cNvSpPr txBox="1"/>
+          <p:nvPr/>
+        </p:nvSpPr>
+        <p:spPr>
+          <a:xfrm>
+            <a:off x="3849624" y="5294376"/>
+            <a:ext cx="1170432" cy="310896"/>
+          </a:xfrm>
+          <a:prstGeom prst="rect">
+            <a:avLst/>
+          </a:prstGeom>
+          <a:noFill/>
+        </p:spPr>
+        <p:txBody>
+          <a:bodyPr wrap="square" anchor="t" lIns="0" rIns="0" tIns="0" bIns="0">
+            <a:spAutoFit/>
+          </a:bodyPr>
+          <a:lstStyle/>
+          <a:p>
+            <a:pPr algn="r"/>
+            <a:r>
+              <a:rPr sz="1150" b="0" i="0">
+                <a:solidFill>
+                  <a:srgbClr val="6B7480"/>
+                </a:solidFill>
+                <a:latin typeface="Inter"/>
+                <a:ea typeface="Inter"/>
+                <a:cs typeface="Inter"/>
+              </a:rPr>
+              <a:t>вес 2.5</a:t>
+            </a:r>
+          </a:p>
+        </p:txBody>
+      </p:sp>
+      <p:sp>
+        <p:nvSpPr>
+          <p:cNvPr id="36" name="Rectangle 35"/>
+          <p:cNvSpPr/>
+          <p:nvPr/>
+        </p:nvSpPr>
+        <p:spPr>
+          <a:xfrm>
+            <a:off x="5166360" y="5340096"/>
+            <a:ext cx="1417320" cy="118872"/>
+          </a:xfrm>
+          <a:prstGeom prst="rect">
+            <a:avLst/>
+          </a:prstGeom>
+          <a:solidFill>
+            <a:srgbClr val="D9DEE2"/>
+          </a:solidFill>
+          <a:ln>
+            <a:noFill/>
+          </a:ln>
+          <a:effectLst/>
+        </p:spPr>
+        <p:style>
+          <a:lnRef idx="1">
+            <a:schemeClr val="accent1"/>
+          </a:lnRef>
+          <a:fillRef idx="3">
+            <a:schemeClr val="accent1"/>
+          </a:fillRef>
+          <a:effectRef idx="2">
+            <a:schemeClr val="accent1"/>
+          </a:effectRef>
+          <a:fontRef idx="minor">
+            <a:schemeClr val="lt1"/>
+          </a:fontRef>
+        </p:style>
+        <p:txBody>
+          <a:bodyPr rtlCol="0" anchor="ctr"/>
+          <a:lstStyle/>
+          <a:p/>
+        </p:txBody>
+      </p:sp>
+      <p:sp>
+        <p:nvSpPr>
+          <p:cNvPr id="37" name="TextBox 36"/>
+          <p:cNvSpPr txBox="1"/>
+          <p:nvPr/>
+        </p:nvSpPr>
+        <p:spPr>
+          <a:xfrm>
+            <a:off x="6675120" y="5294376"/>
+            <a:ext cx="868680" cy="310896"/>
+          </a:xfrm>
+          <a:prstGeom prst="rect">
+            <a:avLst/>
+          </a:prstGeom>
+          <a:noFill/>
+        </p:spPr>
+        <p:txBody>
+          <a:bodyPr wrap="square" anchor="t" lIns="0" rIns="0" tIns="0" bIns="0">
+            <a:spAutoFit/>
+          </a:bodyPr>
+          <a:lstStyle/>
+          <a:p>
+            <a:pPr algn="r"/>
+            <a:r>
+              <a:rPr sz="1250" b="1" i="0">
+                <a:solidFill>
+                  <a:srgbClr val="202B3A"/>
+                </a:solidFill>
+                <a:latin typeface="Inter"/>
+                <a:ea typeface="Inter"/>
+                <a:cs typeface="Inter"/>
+              </a:rPr>
+              <a:t>0.0</a:t>
+            </a:r>
+          </a:p>
+        </p:txBody>
+      </p:sp>
+      <p:cxnSp>
+        <p:nvCxnSpPr>
+          <p:cNvPr id="38" name="Connector 37"/>
+          <p:cNvCxnSpPr/>
+          <p:nvPr/>
+        </p:nvCxnSpPr>
+        <p:spPr>
+          <a:xfrm>
+            <a:off x="777240" y="5870448"/>
+            <a:ext cx="6766560" cy="0"/>
+          </a:xfrm>
+          <a:prstGeom prst="line">
+            <a:avLst/>
+          </a:prstGeom>
+          <a:ln w="9525">
+            <a:solidFill>
+              <a:srgbClr val="D9DEE2"/>
+            </a:solidFill>
+          </a:ln>
+        </p:spPr>
+        <p:style>
+          <a:lnRef idx="2">
+            <a:schemeClr val="accent1"/>
+          </a:lnRef>
+          <a:fillRef idx="0">
+            <a:schemeClr val="accent1"/>
+          </a:fillRef>
+          <a:effectRef idx="1">
+            <a:schemeClr val="accent1"/>
+          </a:effectRef>
+          <a:fontRef idx="minor">
+            <a:schemeClr val="tx1"/>
+          </a:fontRef>
+        </p:style>
+      </p:cxnSp>
+      <p:sp>
+        <p:nvSpPr>
+          <p:cNvPr id="39" name="TextBox 38"/>
+          <p:cNvSpPr txBox="1"/>
+          <p:nvPr/>
+        </p:nvSpPr>
+        <p:spPr>
+          <a:xfrm>
+            <a:off x="777240" y="5998464"/>
+            <a:ext cx="6949440" cy="365760"/>
+          </a:xfrm>
+          <a:prstGeom prst="rect">
+            <a:avLst/>
+          </a:prstGeom>
+          <a:noFill/>
+        </p:spPr>
+        <p:txBody>
+          <a:bodyPr wrap="square" anchor="t" lIns="0" rIns="0" tIns="0" bIns="0">
+            <a:spAutoFit/>
+          </a:bodyPr>
+          <a:lstStyle/>
+          <a:p>
+            <a:pPr algn="l"/>
+            <a:r>
+              <a:rPr sz="1250" b="1">
+                <a:solidFill>
+                  <a:srgbClr val="202B3A"/>
+                </a:solidFill>
+                <a:latin typeface="Inter"/>
+                <a:ea typeface="Inter"/>
+                <a:cs typeface="Inter"/>
+              </a:rPr>
+              <a:t>Итог: </a:t>
+            </a:r>
+            <a:r>
+              <a:rPr sz="1250" b="0">
+                <a:solidFill>
+                  <a:srgbClr val="202B3A"/>
+                </a:solidFill>
+                <a:latin typeface="Inter"/>
+                <a:ea typeface="Inter"/>
+                <a:cs typeface="Inter"/>
+              </a:rPr>
+              <a:t>100 × 7.5 / 13 = 71.4 из 100. </a:t>
+            </a:r>
+            <a:r>
+              <a:rPr sz="1250" b="0">
+                <a:solidFill>
+                  <a:srgbClr val="6B7480"/>
+                </a:solidFill>
+                <a:latin typeface="Inter"/>
+                <a:ea typeface="Inter"/>
+                <a:cs typeface="Inter"/>
+              </a:rPr>
+              <a:t>Веса настраиваются аналитиком.</a:t>
+            </a:r>
+          </a:p>
+        </p:txBody>
+      </p:sp>
+      <p:sp>
+        <p:nvSpPr>
+          <p:cNvPr id="40" name="TextBox 39"/>
+          <p:cNvSpPr txBox="1"/>
+          <p:nvPr/>
+        </p:nvSpPr>
+        <p:spPr>
+          <a:xfrm>
+            <a:off x="8092440" y="2377440"/>
+            <a:ext cx="3337560" cy="320040"/>
+          </a:xfrm>
+          <a:prstGeom prst="rect">
+            <a:avLst/>
+          </a:prstGeom>
+          <a:noFill/>
+        </p:spPr>
+        <p:txBody>
+          <a:bodyPr wrap="square" anchor="t" lIns="0" rIns="0" tIns="0" bIns="0">
+            <a:spAutoFit/>
+          </a:bodyPr>
+          <a:lstStyle/>
+          <a:p>
+            <a:pPr algn="l"/>
+            <a:r>
+              <a:rPr sz="1100" b="1" i="0">
+                <a:solidFill>
+                  <a:srgbClr val="6B7480"/>
+                </a:solidFill>
+                <a:latin typeface="Inter"/>
+                <a:ea typeface="Inter"/>
+                <a:cs typeface="Inter"/>
+              </a:rPr>
+              <a:t>КАК ЭТО ЧИТАТЬ</a:t>
+            </a:r>
+          </a:p>
+        </p:txBody>
+      </p:sp>
+      <p:sp>
+        <p:nvSpPr>
+          <p:cNvPr id="41" name="Rectangle 40"/>
+          <p:cNvSpPr/>
+          <p:nvPr/>
+        </p:nvSpPr>
+        <p:spPr>
+          <a:xfrm>
+            <a:off x="8092440" y="2843784"/>
+            <a:ext cx="137160" cy="137160"/>
           </a:xfrm>
           <a:prstGeom prst="rect">
             <a:avLst/>
@@ -8702,14 +9176,14 @@
       </p:sp>
       <p:sp>
         <p:nvSpPr>
-          <p:cNvPr id="30" name="TextBox 29"/>
+          <p:cNvPr id="42" name="TextBox 41"/>
           <p:cNvSpPr txBox="1"/>
           <p:nvPr/>
         </p:nvSpPr>
         <p:spPr>
           <a:xfrm>
-            <a:off x="6675120" y="4453128"/>
-            <a:ext cx="868680" cy="310896"/>
+            <a:off x="8421624" y="2798064"/>
+            <a:ext cx="3008376" cy="1005840"/>
           </a:xfrm>
           <a:prstGeom prst="rect">
             <a:avLst/>
@@ -8722,9 +9196,13 @@
           </a:bodyPr>
           <a:lstStyle/>
           <a:p>
-            <a:pPr algn="r"/>
-            <a:r>
-              <a:rPr sz="1250" b="1" i="0">
+            <a:pPr algn="l">
+              <a:lnSpc>
+                <a:spcPct val="135000"/>
+              </a:lnSpc>
+            </a:pPr>
+            <a:r>
+              <a:rPr sz="1250" b="0" i="0">
                 <a:solidFill>
                   <a:srgbClr val="202B3A"/>
                 </a:solidFill>
@@ -8732,290 +9210,21 @@
                 <a:ea typeface="Inter"/>
                 <a:cs typeface="Inter"/>
               </a:rPr>
-              <a:t>2.0</a:t>
-            </a:r>
-          </a:p>
-        </p:txBody>
-      </p:sp>
-      <p:sp>
-        <p:nvSpPr>
-          <p:cNvPr id="31" name="TextBox 30"/>
-          <p:cNvSpPr txBox="1"/>
-          <p:nvPr/>
-        </p:nvSpPr>
-        <p:spPr>
-          <a:xfrm>
-            <a:off x="777240" y="4873752"/>
-            <a:ext cx="3035808" cy="310896"/>
-          </a:xfrm>
-          <a:prstGeom prst="rect">
-            <a:avLst/>
-          </a:prstGeom>
-          <a:noFill/>
-        </p:spPr>
-        <p:txBody>
-          <a:bodyPr wrap="square" anchor="t" lIns="0" rIns="0" tIns="0" bIns="0">
-            <a:spAutoFit/>
-          </a:bodyPr>
-          <a:lstStyle/>
-          <a:p>
-            <a:pPr algn="l"/>
-            <a:r>
-              <a:rPr sz="1200" b="1" i="0">
-                <a:solidFill>
-                  <a:srgbClr val="202B3A"/>
-                </a:solidFill>
-                <a:latin typeface="Inter"/>
-                <a:ea typeface="Inter"/>
-                <a:cs typeface="Inter"/>
-              </a:rPr>
-              <a:t>Услуга приостановлена</a:t>
-            </a:r>
-          </a:p>
-        </p:txBody>
-      </p:sp>
-      <p:sp>
-        <p:nvSpPr>
-          <p:cNvPr id="32" name="TextBox 31"/>
-          <p:cNvSpPr txBox="1"/>
-          <p:nvPr/>
-        </p:nvSpPr>
-        <p:spPr>
-          <a:xfrm>
-            <a:off x="3849624" y="4873752"/>
-            <a:ext cx="1170432" cy="310896"/>
-          </a:xfrm>
-          <a:prstGeom prst="rect">
-            <a:avLst/>
-          </a:prstGeom>
-          <a:noFill/>
-        </p:spPr>
-        <p:txBody>
-          <a:bodyPr wrap="square" anchor="t" lIns="0" rIns="0" tIns="0" bIns="0">
-            <a:spAutoFit/>
-          </a:bodyPr>
-          <a:lstStyle/>
-          <a:p>
-            <a:pPr algn="r"/>
-            <a:r>
-              <a:rPr sz="1150" b="0" i="0">
-                <a:solidFill>
-                  <a:srgbClr val="6B7480"/>
-                </a:solidFill>
-                <a:latin typeface="Inter"/>
-                <a:ea typeface="Inter"/>
-                <a:cs typeface="Inter"/>
-              </a:rPr>
-              <a:t>вес 2</a:t>
-            </a:r>
-          </a:p>
-        </p:txBody>
-      </p:sp>
-      <p:sp>
-        <p:nvSpPr>
-          <p:cNvPr id="33" name="Rectangle 32"/>
+              <a:t>Балл — сила наблюдаемых сигналов, не вероятность ухода в процентах.</a:t>
+            </a:r>
+          </a:p>
+        </p:txBody>
+      </p:sp>
+      <p:sp>
+        <p:nvSpPr>
+          <p:cNvPr id="43" name="Rectangle 42"/>
           <p:cNvSpPr/>
           <p:nvPr/>
         </p:nvSpPr>
         <p:spPr>
           <a:xfrm>
-            <a:off x="5166360" y="4919472"/>
-            <a:ext cx="1417320" cy="118872"/>
-          </a:xfrm>
-          <a:prstGeom prst="rect">
-            <a:avLst/>
-          </a:prstGeom>
-          <a:solidFill>
-            <a:srgbClr val="D9DEE2"/>
-          </a:solidFill>
-          <a:ln>
-            <a:noFill/>
-          </a:ln>
-          <a:effectLst/>
-        </p:spPr>
-        <p:style>
-          <a:lnRef idx="1">
-            <a:schemeClr val="accent1"/>
-          </a:lnRef>
-          <a:fillRef idx="3">
-            <a:schemeClr val="accent1"/>
-          </a:fillRef>
-          <a:effectRef idx="2">
-            <a:schemeClr val="accent1"/>
-          </a:effectRef>
-          <a:fontRef idx="minor">
-            <a:schemeClr val="lt1"/>
-          </a:fontRef>
-        </p:style>
-        <p:txBody>
-          <a:bodyPr rtlCol="0" anchor="ctr"/>
-          <a:lstStyle/>
-          <a:p/>
-        </p:txBody>
-      </p:sp>
-      <p:sp>
-        <p:nvSpPr>
-          <p:cNvPr id="34" name="TextBox 33"/>
-          <p:cNvSpPr txBox="1"/>
-          <p:nvPr/>
-        </p:nvSpPr>
-        <p:spPr>
-          <a:xfrm>
-            <a:off x="6675120" y="4873752"/>
-            <a:ext cx="868680" cy="310896"/>
-          </a:xfrm>
-          <a:prstGeom prst="rect">
-            <a:avLst/>
-          </a:prstGeom>
-          <a:noFill/>
-        </p:spPr>
-        <p:txBody>
-          <a:bodyPr wrap="square" anchor="t" lIns="0" rIns="0" tIns="0" bIns="0">
-            <a:spAutoFit/>
-          </a:bodyPr>
-          <a:lstStyle/>
-          <a:p>
-            <a:pPr algn="r"/>
-            <a:r>
-              <a:rPr sz="1250" b="1" i="0">
-                <a:solidFill>
-                  <a:srgbClr val="202B3A"/>
-                </a:solidFill>
-                <a:latin typeface="Inter"/>
-                <a:ea typeface="Inter"/>
-                <a:cs typeface="Inter"/>
-              </a:rPr>
-              <a:t>0.0</a:t>
-            </a:r>
-          </a:p>
-        </p:txBody>
-      </p:sp>
-      <p:sp>
-        <p:nvSpPr>
-          <p:cNvPr id="35" name="TextBox 34"/>
-          <p:cNvSpPr txBox="1"/>
-          <p:nvPr/>
-        </p:nvSpPr>
-        <p:spPr>
-          <a:xfrm>
-            <a:off x="777240" y="5294376"/>
-            <a:ext cx="3035808" cy="310896"/>
-          </a:xfrm>
-          <a:prstGeom prst="rect">
-            <a:avLst/>
-          </a:prstGeom>
-          <a:noFill/>
-        </p:spPr>
-        <p:txBody>
-          <a:bodyPr wrap="square" anchor="t" lIns="0" rIns="0" tIns="0" bIns="0">
-            <a:spAutoFit/>
-          </a:bodyPr>
-          <a:lstStyle/>
-          <a:p>
-            <a:pPr algn="l"/>
-            <a:r>
-              <a:rPr sz="1200" b="1" i="0">
-                <a:solidFill>
-                  <a:srgbClr val="202B3A"/>
-                </a:solidFill>
-                <a:latin typeface="Inter"/>
-                <a:ea typeface="Inter"/>
-                <a:cs typeface="Inter"/>
-              </a:rPr>
-              <a:t>Доля неуспешных продлений</a:t>
-            </a:r>
-          </a:p>
-        </p:txBody>
-      </p:sp>
-      <p:sp>
-        <p:nvSpPr>
-          <p:cNvPr id="36" name="TextBox 35"/>
-          <p:cNvSpPr txBox="1"/>
-          <p:nvPr/>
-        </p:nvSpPr>
-        <p:spPr>
-          <a:xfrm>
-            <a:off x="3849624" y="5294376"/>
-            <a:ext cx="1170432" cy="310896"/>
-          </a:xfrm>
-          <a:prstGeom prst="rect">
-            <a:avLst/>
-          </a:prstGeom>
-          <a:noFill/>
-        </p:spPr>
-        <p:txBody>
-          <a:bodyPr wrap="square" anchor="t" lIns="0" rIns="0" tIns="0" bIns="0">
-            <a:spAutoFit/>
-          </a:bodyPr>
-          <a:lstStyle/>
-          <a:p>
-            <a:pPr algn="r"/>
-            <a:r>
-              <a:rPr sz="1150" b="0" i="0">
-                <a:solidFill>
-                  <a:srgbClr val="6B7480"/>
-                </a:solidFill>
-                <a:latin typeface="Inter"/>
-                <a:ea typeface="Inter"/>
-                <a:cs typeface="Inter"/>
-              </a:rPr>
-              <a:t>вес 1.5</a:t>
-            </a:r>
-          </a:p>
-        </p:txBody>
-      </p:sp>
-      <p:sp>
-        <p:nvSpPr>
-          <p:cNvPr id="37" name="Rectangle 36"/>
-          <p:cNvSpPr/>
-          <p:nvPr/>
-        </p:nvSpPr>
-        <p:spPr>
-          <a:xfrm>
-            <a:off x="5166360" y="5340096"/>
-            <a:ext cx="1417320" cy="118872"/>
-          </a:xfrm>
-          <a:prstGeom prst="rect">
-            <a:avLst/>
-          </a:prstGeom>
-          <a:solidFill>
-            <a:srgbClr val="D9DEE2"/>
-          </a:solidFill>
-          <a:ln>
-            <a:noFill/>
-          </a:ln>
-          <a:effectLst/>
-        </p:spPr>
-        <p:style>
-          <a:lnRef idx="1">
-            <a:schemeClr val="accent1"/>
-          </a:lnRef>
-          <a:fillRef idx="3">
-            <a:schemeClr val="accent1"/>
-          </a:fillRef>
-          <a:effectRef idx="2">
-            <a:schemeClr val="accent1"/>
-          </a:effectRef>
-          <a:fontRef idx="minor">
-            <a:schemeClr val="lt1"/>
-          </a:fontRef>
-        </p:style>
-        <p:txBody>
-          <a:bodyPr rtlCol="0" anchor="ctr"/>
-          <a:lstStyle/>
-          <a:p/>
-        </p:txBody>
-      </p:sp>
-      <p:sp>
-        <p:nvSpPr>
-          <p:cNvPr id="38" name="Rectangle 37"/>
-          <p:cNvSpPr/>
-          <p:nvPr/>
-        </p:nvSpPr>
-        <p:spPr>
-          <a:xfrm>
-            <a:off x="5166360" y="5340096"/>
-            <a:ext cx="708660" cy="118872"/>
+            <a:off x="8092440" y="3904488"/>
+            <a:ext cx="137160" cy="137160"/>
           </a:xfrm>
           <a:prstGeom prst="rect">
             <a:avLst/>
@@ -9050,223 +9259,13 @@
       </p:sp>
       <p:sp>
         <p:nvSpPr>
-          <p:cNvPr id="39" name="TextBox 38"/>
-          <p:cNvSpPr txBox="1"/>
-          <p:nvPr/>
-        </p:nvSpPr>
-        <p:spPr>
-          <a:xfrm>
-            <a:off x="6675120" y="5294376"/>
-            <a:ext cx="868680" cy="310896"/>
-          </a:xfrm>
-          <a:prstGeom prst="rect">
-            <a:avLst/>
-          </a:prstGeom>
-          <a:noFill/>
-        </p:spPr>
-        <p:txBody>
-          <a:bodyPr wrap="square" anchor="t" lIns="0" rIns="0" tIns="0" bIns="0">
-            <a:spAutoFit/>
-          </a:bodyPr>
-          <a:lstStyle/>
-          <a:p>
-            <a:pPr algn="r"/>
-            <a:r>
-              <a:rPr sz="1250" b="1" i="0">
-                <a:solidFill>
-                  <a:srgbClr val="202B3A"/>
-                </a:solidFill>
-                <a:latin typeface="Inter"/>
-                <a:ea typeface="Inter"/>
-                <a:cs typeface="Inter"/>
-              </a:rPr>
-              <a:t>1.5</a:t>
-            </a:r>
-          </a:p>
-        </p:txBody>
-      </p:sp>
-      <p:cxnSp>
-        <p:nvCxnSpPr>
-          <p:cNvPr id="40" name="Connector 39"/>
-          <p:cNvCxnSpPr/>
-          <p:nvPr/>
-        </p:nvCxnSpPr>
-        <p:spPr>
-          <a:xfrm>
-            <a:off x="777240" y="5870448"/>
-            <a:ext cx="6766560" cy="0"/>
-          </a:xfrm>
-          <a:prstGeom prst="line">
-            <a:avLst/>
-          </a:prstGeom>
-          <a:ln w="9525">
-            <a:solidFill>
-              <a:srgbClr val="D9DEE2"/>
-            </a:solidFill>
-          </a:ln>
-        </p:spPr>
-        <p:style>
-          <a:lnRef idx="2">
-            <a:schemeClr val="accent1"/>
-          </a:lnRef>
-          <a:fillRef idx="0">
-            <a:schemeClr val="accent1"/>
-          </a:fillRef>
-          <a:effectRef idx="1">
-            <a:schemeClr val="accent1"/>
-          </a:effectRef>
-          <a:fontRef idx="minor">
-            <a:schemeClr val="tx1"/>
-          </a:fontRef>
-        </p:style>
-      </p:cxnSp>
-      <p:sp>
-        <p:nvSpPr>
-          <p:cNvPr id="41" name="TextBox 40"/>
-          <p:cNvSpPr txBox="1"/>
-          <p:nvPr/>
-        </p:nvSpPr>
-        <p:spPr>
-          <a:xfrm>
-            <a:off x="777240" y="5998464"/>
-            <a:ext cx="6949440" cy="365760"/>
-          </a:xfrm>
-          <a:prstGeom prst="rect">
-            <a:avLst/>
-          </a:prstGeom>
-          <a:noFill/>
-        </p:spPr>
-        <p:txBody>
-          <a:bodyPr wrap="square" anchor="t" lIns="0" rIns="0" tIns="0" bIns="0">
-            <a:spAutoFit/>
-          </a:bodyPr>
-          <a:lstStyle/>
-          <a:p>
-            <a:pPr algn="l"/>
-            <a:r>
-              <a:rPr sz="1250" b="1">
-                <a:solidFill>
-                  <a:srgbClr val="202B3A"/>
-                </a:solidFill>
-                <a:latin typeface="Inter"/>
-                <a:ea typeface="Inter"/>
-                <a:cs typeface="Inter"/>
-              </a:rPr>
-              <a:t>Итог: </a:t>
-            </a:r>
-            <a:r>
-              <a:rPr sz="1250" b="0">
-                <a:solidFill>
-                  <a:srgbClr val="202B3A"/>
-                </a:solidFill>
-                <a:latin typeface="Inter"/>
-                <a:ea typeface="Inter"/>
-                <a:cs typeface="Inter"/>
-              </a:rPr>
-              <a:t>100 × 11 / 15 = 73.3 из 100. </a:t>
-            </a:r>
-            <a:r>
-              <a:rPr sz="1250" b="0">
-                <a:solidFill>
-                  <a:srgbClr val="6B7480"/>
-                </a:solidFill>
-                <a:latin typeface="Inter"/>
-                <a:ea typeface="Inter"/>
-                <a:cs typeface="Inter"/>
-              </a:rPr>
-              <a:t>Веса настраиваются аналитиком.</a:t>
-            </a:r>
-          </a:p>
-        </p:txBody>
-      </p:sp>
-      <p:sp>
-        <p:nvSpPr>
-          <p:cNvPr id="42" name="TextBox 41"/>
-          <p:cNvSpPr txBox="1"/>
-          <p:nvPr/>
-        </p:nvSpPr>
-        <p:spPr>
-          <a:xfrm>
-            <a:off x="8092440" y="2377440"/>
-            <a:ext cx="3337560" cy="320040"/>
-          </a:xfrm>
-          <a:prstGeom prst="rect">
-            <a:avLst/>
-          </a:prstGeom>
-          <a:noFill/>
-        </p:spPr>
-        <p:txBody>
-          <a:bodyPr wrap="square" anchor="t" lIns="0" rIns="0" tIns="0" bIns="0">
-            <a:spAutoFit/>
-          </a:bodyPr>
-          <a:lstStyle/>
-          <a:p>
-            <a:pPr algn="l"/>
-            <a:r>
-              <a:rPr sz="1100" b="1" i="0">
-                <a:solidFill>
-                  <a:srgbClr val="6B7480"/>
-                </a:solidFill>
-                <a:latin typeface="Inter"/>
-                <a:ea typeface="Inter"/>
-                <a:cs typeface="Inter"/>
-              </a:rPr>
-              <a:t>КАК ЭТО ЧИТАТЬ</a:t>
-            </a:r>
-          </a:p>
-        </p:txBody>
-      </p:sp>
-      <p:sp>
-        <p:nvSpPr>
-          <p:cNvPr id="43" name="Rectangle 42"/>
-          <p:cNvSpPr/>
-          <p:nvPr/>
-        </p:nvSpPr>
-        <p:spPr>
-          <a:xfrm>
-            <a:off x="8092440" y="2843784"/>
-            <a:ext cx="137160" cy="137160"/>
-          </a:xfrm>
-          <a:prstGeom prst="rect">
-            <a:avLst/>
-          </a:prstGeom>
-          <a:solidFill>
-            <a:srgbClr val="EF634D"/>
-          </a:solidFill>
-          <a:ln>
-            <a:noFill/>
-          </a:ln>
-          <a:effectLst/>
-        </p:spPr>
-        <p:style>
-          <a:lnRef idx="1">
-            <a:schemeClr val="accent1"/>
-          </a:lnRef>
-          <a:fillRef idx="3">
-            <a:schemeClr val="accent1"/>
-          </a:fillRef>
-          <a:effectRef idx="2">
-            <a:schemeClr val="accent1"/>
-          </a:effectRef>
-          <a:fontRef idx="minor">
-            <a:schemeClr val="lt1"/>
-          </a:fontRef>
-        </p:style>
-        <p:txBody>
-          <a:bodyPr rtlCol="0" anchor="ctr"/>
-          <a:lstStyle/>
-          <a:p/>
-        </p:txBody>
-      </p:sp>
-      <p:sp>
-        <p:nvSpPr>
           <p:cNvPr id="44" name="TextBox 43"/>
           <p:cNvSpPr txBox="1"/>
           <p:nvPr/>
         </p:nvSpPr>
         <p:spPr>
           <a:xfrm>
-            <a:off x="8421624" y="2798064"/>
+            <a:off x="8421624" y="3858768"/>
             <a:ext cx="3008376" cy="1005840"/>
           </a:xfrm>
           <a:prstGeom prst="rect">
@@ -9294,7 +9293,7 @@
                 <a:ea typeface="Inter"/>
                 <a:cs typeface="Inter"/>
               </a:rPr>
-              <a:t>Балл — сила наблюдаемых сигналов, не вероятность ухода в процентах.</a:t>
+              <a:t>Факторы не доказывают причину оттока: модель rule-based, без обучения.</a:t>
             </a:r>
           </a:p>
         </p:txBody>
@@ -9302,89 +9301,6 @@
       <p:sp>
         <p:nvSpPr>
           <p:cNvPr id="45" name="Rectangle 44"/>
-          <p:cNvSpPr/>
-          <p:nvPr/>
-        </p:nvSpPr>
-        <p:spPr>
-          <a:xfrm>
-            <a:off x="8092440" y="3904488"/>
-            <a:ext cx="137160" cy="137160"/>
-          </a:xfrm>
-          <a:prstGeom prst="rect">
-            <a:avLst/>
-          </a:prstGeom>
-          <a:solidFill>
-            <a:srgbClr val="EF634D"/>
-          </a:solidFill>
-          <a:ln>
-            <a:noFill/>
-          </a:ln>
-          <a:effectLst/>
-        </p:spPr>
-        <p:style>
-          <a:lnRef idx="1">
-            <a:schemeClr val="accent1"/>
-          </a:lnRef>
-          <a:fillRef idx="3">
-            <a:schemeClr val="accent1"/>
-          </a:fillRef>
-          <a:effectRef idx="2">
-            <a:schemeClr val="accent1"/>
-          </a:effectRef>
-          <a:fontRef idx="minor">
-            <a:schemeClr val="lt1"/>
-          </a:fontRef>
-        </p:style>
-        <p:txBody>
-          <a:bodyPr rtlCol="0" anchor="ctr"/>
-          <a:lstStyle/>
-          <a:p/>
-        </p:txBody>
-      </p:sp>
-      <p:sp>
-        <p:nvSpPr>
-          <p:cNvPr id="46" name="TextBox 45"/>
-          <p:cNvSpPr txBox="1"/>
-          <p:nvPr/>
-        </p:nvSpPr>
-        <p:spPr>
-          <a:xfrm>
-            <a:off x="8421624" y="3858768"/>
-            <a:ext cx="3008376" cy="1005840"/>
-          </a:xfrm>
-          <a:prstGeom prst="rect">
-            <a:avLst/>
-          </a:prstGeom>
-          <a:noFill/>
-        </p:spPr>
-        <p:txBody>
-          <a:bodyPr wrap="square" anchor="t" lIns="0" rIns="0" tIns="0" bIns="0">
-            <a:spAutoFit/>
-          </a:bodyPr>
-          <a:lstStyle/>
-          <a:p>
-            <a:pPr algn="l">
-              <a:lnSpc>
-                <a:spcPct val="135000"/>
-              </a:lnSpc>
-            </a:pPr>
-            <a:r>
-              <a:rPr sz="1250" b="0" i="0">
-                <a:solidFill>
-                  <a:srgbClr val="202B3A"/>
-                </a:solidFill>
-                <a:latin typeface="Inter"/>
-                <a:ea typeface="Inter"/>
-                <a:cs typeface="Inter"/>
-              </a:rPr>
-              <a:t>Факторы не доказывают причину оттока: модель rule-based, без обучения.</a:t>
-            </a:r>
-          </a:p>
-        </p:txBody>
-      </p:sp>
-      <p:sp>
-        <p:nvSpPr>
-          <p:cNvPr id="47" name="Rectangle 46"/>
           <p:cNvSpPr/>
           <p:nvPr/>
         </p:nvSpPr>
@@ -9426,7 +9342,7 @@
       </p:sp>
       <p:sp>
         <p:nvSpPr>
-          <p:cNvPr id="48" name="TextBox 47"/>
+          <p:cNvPr id="46" name="TextBox 45"/>
           <p:cNvSpPr txBox="1"/>
           <p:nvPr/>
         </p:nvSpPr>
@@ -9467,7 +9383,7 @@
       </p:sp>
       <p:sp>
         <p:nvSpPr>
-          <p:cNvPr id="49" name="TextBox 48"/>
+          <p:cNvPr id="47" name="TextBox 46"/>
           <p:cNvSpPr txBox="1"/>
           <p:nvPr/>
         </p:nvSpPr>
@@ -9735,7 +9651,7 @@
                 <a:ea typeface="Inter"/>
                 <a:cs typeface="Inter"/>
               </a:rPr>
-              <a:t>5,74 €</a:t>
+              <a:t>5,80 €</a:t>
             </a:r>
           </a:p>
           <a:p>
@@ -11677,7 +11593,7 @@
                 <a:ea typeface="Inter"/>
                 <a:cs typeface="Inter"/>
               </a:rPr>
-              <a:t>73.3</a:t>
+              <a:t>71.4</a:t>
             </a:r>
             <a:r>
               <a:rPr sz="4000" b="0">
@@ -11699,7 +11615,7 @@
                 <a:ea typeface="Inter"/>
                 <a:cs typeface="Inter"/>
               </a:rPr>
-              <a:t>81.0</a:t>
+              <a:t>81.8</a:t>
             </a:r>
           </a:p>
         </p:txBody>
@@ -11773,7 +11689,7 @@
                 <a:ea typeface="Inter"/>
                 <a:cs typeface="Inter"/>
               </a:rPr>
-              <a:t>2</a:t>
+              <a:t>3</a:t>
             </a:r>
             <a:r>
               <a:rPr sz="1900" b="0">
@@ -11869,7 +11785,7 @@
                 <a:ea typeface="Inter"/>
                 <a:cs typeface="Inter"/>
               </a:rPr>
-              <a:t>4</a:t>
+              <a:t>3</a:t>
             </a:r>
             <a:r>
               <a:rPr sz="1900" b="0">
@@ -11965,7 +11881,7 @@
                 <a:ea typeface="Inter"/>
                 <a:cs typeface="Inter"/>
               </a:rPr>
-              <a:t>5,74 €</a:t>
+              <a:t>5,80 €</a:t>
             </a:r>
             <a:r>
               <a:rPr sz="1900" b="0">
@@ -11987,7 +11903,7 @@
                 <a:ea typeface="Inter"/>
                 <a:cs typeface="Inter"/>
               </a:rPr>
-              <a:t>7,48 €</a:t>
+              <a:t>7,72 €</a:t>
             </a:r>
           </a:p>
         </p:txBody>

--- a/aeza_hackathon_osen_2026.pptx
+++ b/aeza_hackathon_osen_2026.pptx
@@ -147,9 +147,9 @@
           </c:spPr>
           <c:cat>
             <c:strRef>
-              <c:f>Sheet1!$A$2:$A$8</c:f>
+              <c:f>Sheet1!$A$2:$A$6</c:f>
               <c:strCache>
-                <c:ptCount val="7"/>
+                <c:ptCount val="5"/>
                 <c:pt idx="0">
                   <c:v>Близость даты окончания · 3,0</c:v>
                 </c:pt>
@@ -160,26 +160,20 @@
                   <c:v>Автопродление отключено · 2,0</c:v>
                 </c:pt>
                 <c:pt idx="3">
-                  <c:v>Неуспешные продления · 2,0</c:v>
+                  <c:v>Недостаточно средств · 0,0</c:v>
                 </c:pt>
                 <c:pt idx="4">
-                  <c:v>Доля неуспешных продлений · 1,5</c:v>
-                </c:pt>
-                <c:pt idx="5">
-                  <c:v>Недостаточно средств · 2,0</c:v>
-                </c:pt>
-                <c:pt idx="6">
-                  <c:v>Услуга приостановлена · 2,0</c:v>
+                  <c:v>Услуга приостановлена · 0,0</c:v>
                 </c:pt>
               </c:strCache>
             </c:strRef>
           </c:cat>
           <c:val>
             <c:numRef>
-              <c:f>Sheet1!$B$2:$B$8</c:f>
+              <c:f>Sheet1!$B$2:$B$6</c:f>
               <c:numCache>
                 <c:formatCode>General</c:formatCode>
-                <c:ptCount val="7"/>
+                <c:ptCount val="5"/>
                 <c:pt idx="0">
                   <c:v>3.0</c:v>
                 </c:pt>
@@ -190,15 +184,9 @@
                   <c:v>2.0</c:v>
                 </c:pt>
                 <c:pt idx="3">
-                  <c:v>2.0</c:v>
+                  <c:v>0.0</c:v>
                 </c:pt>
                 <c:pt idx="4">
-                  <c:v>1.5</c:v>
-                </c:pt>
-                <c:pt idx="5">
-                  <c:v>0.0</c:v>
-                </c:pt>
-                <c:pt idx="6">
                   <c:v>0.0</c:v>
                 </c:pt>
               </c:numCache>
@@ -927,7 +915,7 @@
           </a:p>
           <a:p>
             <a:r>
-              <a:t>по 6 есть неуспешные продления и 6 услуг приостановлены. Каждый сигнал по</a:t>
+              <a:t>6 услуг приостановлены и 6 ждут продления. Каждый сигнал по</a:t>
             </a:r>
           </a:p>
           <a:p>
@@ -1064,7 +1052,12 @@
           </a:p>
           <a:p>
             <a:r>
-              <a:t>строку user-0010@example.test — верхняя, балл 73,3), справа сводные метрики и блок</a:t>
+              <a:t>строку user-0010@example.test — балл 71,4, верхняя группа риска), справа сводные</a:t>
+            </a:r>
+          </a:p>
+          <a:p>
+            <a:r>
+              <a:t>метрики и блок</a:t>
             </a:r>
           </a:p>
           <a:p>
@@ -1159,17 +1152,22 @@
           </a:p>
           <a:p>
             <a:r>
-              <a:t>«Открываем список клиентов — он уже отсортирован по риску. Верхняя строка:</a:t>
-            </a:r>
-          </a:p>
-          <a:p>
-            <a:r>
-              <a:t>клиент #10, балл 73,3 из 100, категория «высокий». Выбираем его не случайно —</a:t>
-            </a:r>
-          </a:p>
-          <a:p>
-            <a:r>
-              <a:t>это максимум по списку.</a:t>
+              <a:t>«Открываем список клиентов — он уже отсортирован по риску. Сверху двое с</a:t>
+            </a:r>
+          </a:p>
+          <a:p>
+            <a:r>
+              <a:t>одинаковым баллом 71,4: клиент #5 и клиент #10. Берём #10 — он показывает</a:t>
+            </a:r>
+          </a:p>
+          <a:p>
+            <a:r>
+              <a:t>то же правило клиентского балла на двух услугах сразу. Максимум по списку</a:t>
+            </a:r>
+          </a:p>
+          <a:p>
+            <a:r>
+              <a:t>именно 71,4, и ни один клиент не поднялся выше.</a:t>
             </a:r>
           </a:p>
           <a:p>
@@ -1189,12 +1187,12 @@
           </a:p>
           <a:p>
             <a:r>
-              <a:t>Причины: услуга просрочена на 35 дней, два продления из двух не выполнены,</a:t>
-            </a:r>
-          </a:p>
-          <a:p>
-            <a:r>
-              <a:t>автопродление выключено.»</a:t>
+              <a:t>Причины: услуга просрочена на 35 дней, ждёт продления, автопродление выключено.</a:t>
+            </a:r>
+          </a:p>
+          <a:p>
+            <a:r>
+              <a:t>Три причины — это ровно те три фактора, что дали вклад в балл.»</a:t>
             </a:r>
           </a:p>
           <a:p/>
@@ -1205,12 +1203,17 @@
           </a:p>
           <a:p>
             <a:r>
-              <a:t>Возможный вопрос: «Почему балл клиента 73,3, а не среднее по услугам?» —</a:t>
+              <a:t>Возможный вопрос: «Почему балл клиента 71,4, а не среднее по услугам?» —</a:t>
             </a:r>
           </a:p>
           <a:p>
             <a:r>
               <a:t>Правило продукта: балл клиента — максимум по услугам, пригодным для прогноза.</a:t>
+            </a:r>
+          </a:p>
+          <a:p>
+            <a:r>
+              <a:t>У #10 это видно наглядно: две услуги по 71,4 и одна 52,4 — берётся максимум.</a:t>
             </a:r>
           </a:p>
           <a:p>
@@ -1300,12 +1303,12 @@
           </a:p>
           <a:p>
             <a:r>
-              <a:t>сумму вес×значение, делить на сумму весов. По этой услуге сумма вкладов 11 из 15 —</a:t>
-            </a:r>
-          </a:p>
-          <a:p>
-            <a:r>
-              <a:t>отсюда 73,3.</a:t>
+              <a:t>сумму вес×значение, делить на сумму весов. По этой услуге сумма вкладов 7,5 из 10,5 —</a:t>
+            </a:r>
+          </a:p>
+          <a:p>
+            <a:r>
+              <a:t>отсюда 71,4.</a:t>
             </a:r>
           </a:p>
           <a:p>
@@ -1315,12 +1318,22 @@
           </a:p>
           <a:p>
             <a:r>
-              <a:t>автопродление и неуспешные продления — по 2,0.</a:t>
-            </a:r>
-          </a:p>
-          <a:p>
-            <a:r>
-              <a:t>Два фактора дали ноль: баланса хватает на продление, услуга не приостановлена.</a:t>
+              <a:t>автопродление отключено — 2,0.</a:t>
+            </a:r>
+          </a:p>
+          <a:p>
+            <a:r>
+              <a:t>Остальные четыре фактора дали ноль: баланса хватает на продление, услуга не</a:t>
+            </a:r>
+          </a:p>
+          <a:p>
+            <a:r>
+              <a:t>приостановлена, а попыток продления за 90 дней нет, поэтому доля неуспешных</a:t>
+            </a:r>
+          </a:p>
+          <a:p>
+            <a:r>
+              <a:t>не определена и в знаменатель не входит.</a:t>
             </a:r>
           </a:p>
           <a:p>
@@ -1431,7 +1444,7 @@
           </a:p>
           <a:p>
             <a:r>
-              <a:t>«Здесь важно не сложить несопоставимое. У клиента #10 балл высокий — 73,3,</a:t>
+              <a:t>«Здесь важно не сложить несопоставимое. У клиента #10 балл высокий — 71,4,</a:t>
             </a:r>
           </a:p>
           <a:p>
@@ -1582,12 +1595,17 @@
           </a:p>
           <a:p>
             <a:r>
-              <a:t>Смотрите, что произошло. Балл клиента #10: 73,3 → 81,0. Клиентов высокого риска:</a:t>
-            </a:r>
-          </a:p>
-          <a:p>
-            <a:r>
-              <a:t>2 → 3, среднего: 4 → 3. Выручка под риском: 5,74 → 7,48 €.</a:t>
+              <a:t>Смотрите, что произошло. Балл клиента #10: 71,4 → 81,8. Услуг высокого риска:</a:t>
+            </a:r>
+          </a:p>
+          <a:p>
+            <a:r>
+              <a:t>4 → 7. Выручка под риском: 5,80 → 7,72 €. Категории клиентов при этом не сдвинулись —</a:t>
+            </a:r>
+          </a:p>
+          <a:p>
+            <a:r>
+              <a:t>это тоже честный результат, и его стоит показать.</a:t>
             </a:r>
           </a:p>
           <a:p>
@@ -1608,12 +1626,17 @@
           </a:p>
           <a:p>
             <a:r>
-              <a:t>обновляется на месте, без перезагрузки: 2 → 3 высокого, 4 → 3 среднего, 5,74 → 7,48 €,</a:t>
-            </a:r>
-          </a:p>
-          <a:p>
-            <a:r>
-              <a:t>сумма весов 15,0 → 21,0. Затем открыть карточку клиента #10 (балл 81,0) и вернуться</a:t>
+              <a:t>обновляется на месте, без перезагрузки: услуг высокого риска 4 → 7, выручка</a:t>
+            </a:r>
+          </a:p>
+          <a:p>
+            <a:r>
+              <a:t>под риском 5,80 → 7,72 €, сумма весов 13,0 → 19,0. Затем открыть карточку клиента #10</a:t>
+            </a:r>
+          </a:p>
+          <a:p>
+            <a:r>
+              <a:t>(балл 81,8) и вернуться</a:t>
             </a:r>
           </a:p>
           <a:p>
@@ -8715,7 +8738,7 @@
                 <a:cs typeface="Manrope"/>
                 <a:ea typeface="Manrope"/>
               </a:rPr>
-              <a:t>неуспешные продления</a:t>
+              <a:t>услуга приостановлена</a:t>
             </a:r>
           </a:p>
         </p:txBody>
@@ -8853,7 +8876,7 @@
                 <a:cs typeface="Manrope"/>
                 <a:ea typeface="Manrope"/>
               </a:rPr>
-              <a:t>услуга приостановлена</a:t>
+              <a:t>ожидание продления</a:t>
             </a:r>
           </a:p>
         </p:txBody>
@@ -9892,7 +9915,7 @@
         <p:spPr>
           <a:xfrm>
             <a:off x="626364" y="3012948"/>
-            <a:ext cx="6556248" cy="2418059"/>
+            <a:ext cx="6556248" cy="2713637"/>
           </a:xfrm>
           <a:prstGeom prst="rect">
             <a:avLst/>
@@ -9946,7 +9969,7 @@
         <p:spPr>
           <a:xfrm>
             <a:off x="658368" y="3044952"/>
-            <a:ext cx="6487678" cy="2354051"/>
+            <a:ext cx="6492240" cy="2649629"/>
           </a:xfrm>
           <a:prstGeom prst="rect">
             <a:avLst/>
@@ -9961,7 +9984,7 @@
         </p:nvSpPr>
         <p:spPr>
           <a:xfrm>
-            <a:off x="658368" y="5508731"/>
+            <a:off x="658368" y="5804309"/>
             <a:ext cx="6492240" cy="180848"/>
           </a:xfrm>
           <a:prstGeom prst="rect">
@@ -10056,7 +10079,7 @@
         <p:spPr>
           <a:xfrm>
             <a:off x="7392924" y="3012948"/>
-            <a:ext cx="4172407" cy="1346239"/>
+            <a:ext cx="4172407" cy="1350834"/>
           </a:xfrm>
           <a:prstGeom prst="rect">
             <a:avLst/>
@@ -10110,7 +10133,7 @@
         <p:spPr>
           <a:xfrm>
             <a:off x="7424928" y="3044952"/>
-            <a:ext cx="4093728" cy="1282231"/>
+            <a:ext cx="4108399" cy="1286826"/>
           </a:xfrm>
           <a:prstGeom prst="rect">
             <a:avLst/>
@@ -10125,8 +10148,8 @@
         </p:nvSpPr>
         <p:spPr>
           <a:xfrm>
-            <a:off x="7392924" y="4496347"/>
-            <a:ext cx="4172407" cy="1297724"/>
+            <a:off x="7392924" y="4500942"/>
+            <a:ext cx="4172407" cy="1173747"/>
           </a:xfrm>
           <a:prstGeom prst="rect">
             <a:avLst/>
@@ -10179,8 +10202,8 @@
         </p:blipFill>
         <p:spPr>
           <a:xfrm>
-            <a:off x="7424928" y="4528351"/>
-            <a:ext cx="4101909" cy="1233716"/>
+            <a:off x="7424928" y="4532946"/>
+            <a:ext cx="4108399" cy="1109739"/>
           </a:xfrm>
           <a:prstGeom prst="rect">
             <a:avLst/>
@@ -10195,7 +10218,7 @@
         </p:nvSpPr>
         <p:spPr>
           <a:xfrm>
-            <a:off x="7424928" y="5871795"/>
+            <a:off x="7424928" y="5752413"/>
             <a:ext cx="4108399" cy="343408"/>
           </a:xfrm>
           <a:prstGeom prst="rect">
@@ -10409,7 +10432,7 @@
                 <a:cs typeface="Manrope"/>
                 <a:ea typeface="Manrope"/>
               </a:rPr>
-              <a:t>Клиент #10 — высокий риск, 73,3 из 100</a:t>
+              <a:t>Клиент #10 — высокий риск, 71,4 из 100</a:t>
             </a:r>
           </a:p>
         </p:txBody>
@@ -10456,7 +10479,7 @@
                 <a:cs typeface="Manrope"/>
                 <a:ea typeface="Manrope"/>
               </a:rPr>
-              <a:t>Верхняя строка списка, отсортированного по риску по убыванию. Слева — реальные поля снимка, справа — тот же</a:t>
+              <a:t>Список отсортирован по риску по убыванию. Балл 71,4 делят клиенты #5 и #10 — берём #10, он выше по номеру.</a:t>
             </a:r>
           </a:p>
           <a:p>
@@ -10480,7 +10503,7 @@
                 <a:cs typeface="Manrope"/>
                 <a:ea typeface="Manrope"/>
               </a:rPr>
-              <a:t>клиент в интерфейсе.</a:t>
+              <a:t>Слева — реальные поля снимка, справа — тот же клиент в интерфейсе.</a:t>
             </a:r>
           </a:p>
         </p:txBody>
@@ -10781,7 +10804,7 @@
                 <a:cs typeface="Manrope SemiBold"/>
                 <a:ea typeface="Manrope SemiBold"/>
               </a:rPr>
-              <a:t>73,3 / 100</a:t>
+              <a:t>71,4 / 100</a:t>
             </a:r>
           </a:p>
         </p:txBody>
@@ -10969,7 +10992,7 @@
                 <a:cs typeface="Manrope Medium"/>
                 <a:ea typeface="Manrope Medium"/>
               </a:rPr>
-              <a:t>1 из 3</a:t>
+              <a:t>2 из 3</a:t>
             </a:r>
           </a:p>
         </p:txBody>
@@ -11218,7 +11241,7 @@
         <p:spPr>
           <a:xfrm>
             <a:off x="4759452" y="2263140"/>
-            <a:ext cx="6805879" cy="410011"/>
+            <a:ext cx="6805879" cy="413652"/>
           </a:xfrm>
           <a:prstGeom prst="rect">
             <a:avLst/>
@@ -11272,7 +11295,7 @@
         <p:spPr>
           <a:xfrm>
             <a:off x="4791456" y="2295144"/>
-            <a:ext cx="6671647" cy="346003"/>
+            <a:ext cx="6741871" cy="349644"/>
           </a:xfrm>
           <a:prstGeom prst="rect">
             <a:avLst/>
@@ -11287,8 +11310,8 @@
         </p:nvSpPr>
         <p:spPr>
           <a:xfrm>
-            <a:off x="4759452" y="2718871"/>
-            <a:ext cx="3361791" cy="1250858"/>
+            <a:off x="4759452" y="2722512"/>
+            <a:ext cx="3361791" cy="1268967"/>
           </a:xfrm>
           <a:prstGeom prst="rect">
             <a:avLst/>
@@ -11341,8 +11364,8 @@
         </p:blipFill>
         <p:spPr>
           <a:xfrm>
-            <a:off x="4791456" y="2750875"/>
-            <a:ext cx="3297783" cy="1186839"/>
+            <a:off x="4791456" y="2754516"/>
+            <a:ext cx="3297783" cy="1204959"/>
           </a:xfrm>
           <a:prstGeom prst="rect">
             <a:avLst/>
@@ -11357,8 +11380,8 @@
         </p:nvSpPr>
         <p:spPr>
           <a:xfrm>
-            <a:off x="8203539" y="2718871"/>
-            <a:ext cx="3361791" cy="1250858"/>
+            <a:off x="8203539" y="2722512"/>
+            <a:ext cx="3361791" cy="1268967"/>
           </a:xfrm>
           <a:prstGeom prst="rect">
             <a:avLst/>
@@ -11411,8 +11434,8 @@
         </p:blipFill>
         <p:spPr>
           <a:xfrm>
-            <a:off x="8235543" y="2750875"/>
-            <a:ext cx="3297783" cy="1186839"/>
+            <a:off x="8235543" y="2754516"/>
+            <a:ext cx="3297783" cy="1204959"/>
           </a:xfrm>
           <a:prstGeom prst="rect">
             <a:avLst/>
@@ -11427,7 +11450,7 @@
         </p:nvSpPr>
         <p:spPr>
           <a:xfrm>
-            <a:off x="4791456" y="4175469"/>
+            <a:off x="4791456" y="4197219"/>
             <a:ext cx="6741871" cy="151003"/>
           </a:xfrm>
           <a:prstGeom prst="rect">
@@ -11474,8 +11497,8 @@
         </p:nvSpPr>
         <p:spPr>
           <a:xfrm>
-            <a:off x="4759452" y="4390353"/>
-            <a:ext cx="6805879" cy="1513779"/>
+            <a:off x="4759452" y="4412103"/>
+            <a:ext cx="6805879" cy="1355554"/>
           </a:xfrm>
           <a:prstGeom prst="rect">
             <a:avLst/>
@@ -11528,8 +11551,8 @@
         </p:blipFill>
         <p:spPr>
           <a:xfrm>
-            <a:off x="4791456" y="4422357"/>
-            <a:ext cx="6697172" cy="1449771"/>
+            <a:off x="4791456" y="4444107"/>
+            <a:ext cx="6741871" cy="1291546"/>
           </a:xfrm>
           <a:prstGeom prst="rect">
             <a:avLst/>
@@ -11544,7 +11567,7 @@
         </p:nvSpPr>
         <p:spPr>
           <a:xfrm>
-            <a:off x="4791456" y="5981856"/>
+            <a:off x="4791456" y="5845381"/>
             <a:ext cx="6741871" cy="364998"/>
           </a:xfrm>
           <a:prstGeom prst="rect">
@@ -11578,7 +11601,7 @@
                 <a:cs typeface="Manrope"/>
                 <a:ea typeface="Manrope"/>
               </a:rPr>
-              <a:t>Почему именно этот клиент: максимальный балл в списке, услуга просрочена на 35 дней, 2 из 2 продлений не</a:t>
+              <a:t>Почему именно этот клиент: максимальный балл в списке, услуга просрочена на 35 дней, ожидает продления,</a:t>
             </a:r>
           </a:p>
           <a:p>
@@ -11602,7 +11625,7 @@
                 <a:cs typeface="Manrope"/>
                 <a:ea typeface="Manrope"/>
               </a:rPr>
-              <a:t>выполнены, автопродление отключено.</a:t>
+              <a:t>автопродление отключено.</a:t>
             </a:r>
           </a:p>
         </p:txBody>
@@ -11896,7 +11919,7 @@
                 <a:cs typeface="Manrope"/>
                 <a:ea typeface="Manrope"/>
               </a:rPr>
-              <a:t>Формула: 100 × Σ(вес × значение) / Σвес. По service-0030 сумма вкладов 11,00 при сумме весов 15,0 → 73,3. Ниже — фактические</a:t>
+              <a:t>Формула: 100 × Σ(вес × значение) / Σвес. По service-0030 сумма вкладов 7,50 при сумме весов 10,5 → 71,4. Ниже — фактические</a:t>
             </a:r>
           </a:p>
           <a:p>
@@ -12013,7 +12036,7 @@
                 <a:cs typeface="Manrope SemiBold"/>
                 <a:ea typeface="Manrope SemiBold"/>
               </a:rPr>
-              <a:t>Вклад факторов в балл 73,3 · service-0030</a:t>
+              <a:t>Вклад факторов в балл 71,4 · service-0030</a:t>
             </a:r>
           </a:p>
         </p:txBody>
@@ -12028,7 +12051,7 @@
         </p:nvGraphicFramePr>
         <p:xfrm>
           <a:off x="822960" y="2571496"/>
-          <a:ext cx="5660136" cy="3280664"/>
+          <a:ext cx="5660136" cy="2933192"/>
         </p:xfrm>
         <a:graphic>
           <a:graphicData uri="http://schemas.openxmlformats.org/drawingml/2006/chart">
@@ -12038,7 +12061,78 @@
       </p:graphicFrame>
       <p:sp>
         <p:nvSpPr>
-          <p:cNvPr id="9" name="Rectangle 8"/>
+          <p:cNvPr id="9" name="TextBox 8"/>
+          <p:cNvSpPr txBox="1"/>
+          <p:nvPr/>
+        </p:nvSpPr>
+        <p:spPr>
+          <a:xfrm>
+            <a:off x="877824" y="5577840"/>
+            <a:ext cx="5550408" cy="297180"/>
+          </a:xfrm>
+          <a:prstGeom prst="rect">
+            <a:avLst/>
+          </a:prstGeom>
+          <a:noFill/>
+        </p:spPr>
+        <p:txBody>
+          <a:bodyPr wrap="square" anchor="t" lIns="0" rIns="0" tIns="0" bIns="0">
+            <a:spAutoFit/>
+          </a:bodyPr>
+          <a:lstStyle/>
+          <a:p>
+            <a:pPr algn="l">
+              <a:lnSpc>
+                <a:spcPct val="122000"/>
+              </a:lnSpc>
+              <a:spcBef>
+                <a:spcPts val="0"/>
+              </a:spcBef>
+              <a:spcAft>
+                <a:spcPts val="0"/>
+              </a:spcAft>
+            </a:pPr>
+            <a:r>
+              <a:rPr sz="900" b="0" i="0">
+                <a:solidFill>
+                  <a:srgbClr val="666666"/>
+                </a:solidFill>
+                <a:latin typeface="Manrope"/>
+                <a:cs typeface="Manrope"/>
+                <a:ea typeface="Manrope"/>
+              </a:rPr>
+              <a:t>Не показаны: доля неуспешных продлений и число неуспешных продлений — за 90 дней попыток не</a:t>
+            </a:r>
+          </a:p>
+          <a:p>
+            <a:pPr algn="l">
+              <a:lnSpc>
+                <a:spcPct val="122000"/>
+              </a:lnSpc>
+              <a:spcBef>
+                <a:spcPts val="0"/>
+              </a:spcBef>
+              <a:spcAft>
+                <a:spcPts val="0"/>
+              </a:spcAft>
+            </a:pPr>
+            <a:r>
+              <a:rPr sz="900" b="0" i="0">
+                <a:solidFill>
+                  <a:srgbClr val="666666"/>
+                </a:solidFill>
+                <a:latin typeface="Manrope"/>
+                <a:cs typeface="Manrope"/>
+                <a:ea typeface="Manrope"/>
+              </a:rPr>
+              <a:t>было, фактор не определён и в знаменатель не входит.</a:t>
+            </a:r>
+          </a:p>
+        </p:txBody>
+      </p:sp>
+      <p:sp>
+        <p:nvSpPr>
+          <p:cNvPr id="10" name="Rectangle 9"/>
           <p:cNvSpPr/>
           <p:nvPr/>
         </p:nvSpPr>
@@ -12084,7 +12178,7 @@
       </p:sp>
       <p:sp>
         <p:nvSpPr>
-          <p:cNvPr id="10" name="Rectangle 9"/>
+          <p:cNvPr id="11" name="Rectangle 10"/>
           <p:cNvSpPr/>
           <p:nvPr/>
         </p:nvSpPr>
@@ -12128,7 +12222,7 @@
       </p:sp>
       <p:sp>
         <p:nvSpPr>
-          <p:cNvPr id="11" name="TextBox 10"/>
+          <p:cNvPr id="12" name="TextBox 11"/>
           <p:cNvSpPr txBox="1"/>
           <p:nvPr/>
         </p:nvSpPr>
@@ -12175,7 +12269,7 @@
       </p:sp>
       <p:sp>
         <p:nvSpPr>
-          <p:cNvPr id="12" name="TextBox 11"/>
+          <p:cNvPr id="13" name="TextBox 12"/>
           <p:cNvSpPr txBox="1"/>
           <p:nvPr/>
         </p:nvSpPr>
@@ -12215,7 +12309,7 @@
                 <a:cs typeface="Manrope"/>
                 <a:ea typeface="Manrope"/>
               </a:rPr>
-              <a:t>Данные снимка: expiresAt 14.09.2026, autoProlong = false, 2</a:t>
+              <a:t>Данные снимка: услуга истекла 35 дней назад, autoProlong = false,</a:t>
             </a:r>
           </a:p>
           <a:p>
@@ -12239,14 +12333,14 @@
                 <a:cs typeface="Manrope"/>
                 <a:ea typeface="Manrope"/>
               </a:rPr>
-              <a:t>продления из 2 со статусом not_performed.</a:t>
-            </a:r>
-          </a:p>
-        </p:txBody>
-      </p:sp>
-      <p:sp>
-        <p:nvSpPr>
-          <p:cNvPr id="13" name="Rectangle 12"/>
+              <a:t>статус prolong_wait.</a:t>
+            </a:r>
+          </a:p>
+        </p:txBody>
+      </p:sp>
+      <p:sp>
+        <p:nvSpPr>
+          <p:cNvPr id="14" name="Rectangle 13"/>
           <p:cNvSpPr/>
           <p:nvPr/>
         </p:nvSpPr>
@@ -12292,7 +12386,7 @@
       </p:sp>
       <p:sp>
         <p:nvSpPr>
-          <p:cNvPr id="14" name="Rectangle 13"/>
+          <p:cNvPr id="15" name="Rectangle 14"/>
           <p:cNvSpPr/>
           <p:nvPr/>
         </p:nvSpPr>
@@ -12336,7 +12430,7 @@
       </p:sp>
       <p:sp>
         <p:nvSpPr>
-          <p:cNvPr id="15" name="TextBox 14"/>
+          <p:cNvPr id="16" name="TextBox 15"/>
           <p:cNvSpPr txBox="1"/>
           <p:nvPr/>
         </p:nvSpPr>
@@ -12383,7 +12477,7 @@
       </p:sp>
       <p:sp>
         <p:nvSpPr>
-          <p:cNvPr id="16" name="TextBox 15"/>
+          <p:cNvPr id="17" name="TextBox 16"/>
           <p:cNvSpPr txBox="1"/>
           <p:nvPr/>
         </p:nvSpPr>
@@ -12423,7 +12517,7 @@
                 <a:cs typeface="Manrope"/>
                 <a:ea typeface="Manrope"/>
               </a:rPr>
-              <a:t>Услуга просрочена, продление не завершено, решение о продлении</a:t>
+              <a:t>Услуга просрочена и ждёт продления, а решение о продлении</a:t>
             </a:r>
           </a:p>
           <a:p>
@@ -12447,14 +12541,14 @@
                 <a:cs typeface="Manrope"/>
                 <a:ea typeface="Manrope"/>
               </a:rPr>
-              <a:t>зависит от клиента.</a:t>
-            </a:r>
-          </a:p>
-        </p:txBody>
-      </p:sp>
-      <p:sp>
-        <p:nvSpPr>
-          <p:cNvPr id="17" name="Rectangle 16"/>
+              <a:t>зависит от клиента, потому что автопродление выключено.</a:t>
+            </a:r>
+          </a:p>
+        </p:txBody>
+      </p:sp>
+      <p:sp>
+        <p:nvSpPr>
+          <p:cNvPr id="18" name="Rectangle 17"/>
           <p:cNvSpPr/>
           <p:nvPr/>
         </p:nvSpPr>
@@ -12500,7 +12594,7 @@
       </p:sp>
       <p:sp>
         <p:nvSpPr>
-          <p:cNvPr id="18" name="Rectangle 17"/>
+          <p:cNvPr id="19" name="Rectangle 18"/>
           <p:cNvSpPr/>
           <p:nvPr/>
         </p:nvSpPr>
@@ -12544,7 +12638,7 @@
       </p:sp>
       <p:sp>
         <p:nvSpPr>
-          <p:cNvPr id="19" name="TextBox 18"/>
+          <p:cNvPr id="20" name="TextBox 19"/>
           <p:cNvSpPr txBox="1"/>
           <p:nvPr/>
         </p:nvSpPr>
@@ -12591,14 +12685,14 @@
       </p:sp>
       <p:sp>
         <p:nvSpPr>
-          <p:cNvPr id="20" name="TextBox 19"/>
+          <p:cNvPr id="21" name="TextBox 20"/>
           <p:cNvSpPr txBox="1"/>
           <p:nvPr/>
         </p:nvSpPr>
         <p:spPr>
           <a:xfrm>
             <a:off x="7123176" y="5200564"/>
-            <a:ext cx="4208983" cy="505968"/>
+            <a:ext cx="4208983" cy="668528"/>
           </a:xfrm>
           <a:prstGeom prst="rect">
             <a:avLst/>
@@ -12631,7 +12725,7 @@
                 <a:cs typeface="Manrope"/>
                 <a:ea typeface="Manrope"/>
               </a:rPr>
-              <a:t>Три крупнейших фактора дают 3,0 + 2,5 + 2,0 = 7,5 из 15,0. С</a:t>
+              <a:t>Три сработавших фактора дают 3,0 + 2,5 + 2,0 = 7,5. Остальные</a:t>
             </a:r>
           </a:p>
           <a:p>
@@ -12655,7 +12749,7 @@
                 <a:cs typeface="Manrope"/>
                 <a:ea typeface="Manrope"/>
               </a:rPr>
-              <a:t>неуспешными продлениями и их долей (2,0 + 1,5) сумма вкладов 11,0</a:t>
+              <a:t>четыре либо равны нулю, либо не определены (нет попыток</a:t>
             </a:r>
           </a:p>
           <a:p>
@@ -12679,14 +12773,38 @@
                 <a:cs typeface="Manrope"/>
                 <a:ea typeface="Manrope"/>
               </a:rPr>
-              <a:t>из 15,0 — отсюда 73,3, выше порога 65.</a:t>
-            </a:r>
-          </a:p>
-        </p:txBody>
-      </p:sp>
-      <p:sp>
-        <p:nvSpPr>
-          <p:cNvPr id="21" name="Rectangle 20"/>
+              <a:t>продления за 90 дней) и в знаменатель не входят: 100 × 7,5 / 10,5 =</a:t>
+            </a:r>
+          </a:p>
+          <a:p>
+            <a:pPr algn="l">
+              <a:lnSpc>
+                <a:spcPct val="128000"/>
+              </a:lnSpc>
+              <a:spcBef>
+                <a:spcPts val="0"/>
+              </a:spcBef>
+              <a:spcAft>
+                <a:spcPts val="0"/>
+              </a:spcAft>
+            </a:pPr>
+            <a:r>
+              <a:rPr sz="1000" b="0" i="0">
+                <a:solidFill>
+                  <a:srgbClr val="666666"/>
+                </a:solidFill>
+                <a:latin typeface="Manrope"/>
+                <a:cs typeface="Manrope"/>
+                <a:ea typeface="Manrope"/>
+              </a:rPr>
+              <a:t>71,4 — выше порога 65.</a:t>
+            </a:r>
+          </a:p>
+        </p:txBody>
+      </p:sp>
+      <p:sp>
+        <p:nvSpPr>
+          <p:cNvPr id="22" name="Rectangle 21"/>
           <p:cNvSpPr/>
           <p:nvPr/>
         </p:nvSpPr>
@@ -12730,7 +12848,7 @@
       </p:sp>
       <p:sp>
         <p:nvSpPr>
-          <p:cNvPr id="22" name="TextBox 21"/>
+          <p:cNvPr id="23" name="TextBox 22"/>
           <p:cNvSpPr txBox="1"/>
           <p:nvPr/>
         </p:nvSpPr>
@@ -13381,7 +13499,7 @@
                 <a:cs typeface="Manrope SemiBold"/>
                 <a:ea typeface="Manrope SemiBold"/>
               </a:rPr>
-              <a:t>73,3 / 100</a:t>
+              <a:t>71,4 / 100</a:t>
             </a:r>
           </a:p>
         </p:txBody>
@@ -13818,7 +13936,7 @@
         <p:spPr>
           <a:xfrm>
             <a:off x="4878323" y="3323844"/>
-            <a:ext cx="6687008" cy="1462829"/>
+            <a:ext cx="6687008" cy="1948137"/>
           </a:xfrm>
           <a:prstGeom prst="rect">
             <a:avLst/>
@@ -13872,7 +13990,7 @@
         <p:spPr>
           <a:xfrm>
             <a:off x="4910327" y="3355848"/>
-            <a:ext cx="6615883" cy="1398821"/>
+            <a:ext cx="6623000" cy="1884129"/>
           </a:xfrm>
           <a:prstGeom prst="rect">
             <a:avLst/>
@@ -13887,8 +14005,8 @@
         </p:nvSpPr>
         <p:spPr>
           <a:xfrm>
-            <a:off x="4910327" y="4965192"/>
-            <a:ext cx="2134514" cy="1088136"/>
+            <a:off x="4910327" y="5477721"/>
+            <a:ext cx="2134514" cy="575607"/>
           </a:xfrm>
           <a:prstGeom prst="rect">
             <a:avLst/>
@@ -13933,7 +14051,7 @@
         </p:nvSpPr>
         <p:spPr>
           <a:xfrm>
-            <a:off x="5038343" y="5093208"/>
+            <a:off x="5038343" y="5605737"/>
             <a:ext cx="1878482" cy="130048"/>
           </a:xfrm>
           <a:prstGeom prst="rect">
@@ -13980,7 +14098,7 @@
         </p:nvSpPr>
         <p:spPr>
           <a:xfrm>
-            <a:off x="5038343" y="5330952"/>
+            <a:off x="5038343" y="5843481"/>
             <a:ext cx="1878482" cy="221487"/>
           </a:xfrm>
           <a:prstGeom prst="rect">
@@ -14014,7 +14132,7 @@
                 <a:cs typeface="Manrope"/>
                 <a:ea typeface="Manrope"/>
               </a:rPr>
-              <a:t>5,74 €</a:t>
+              <a:t>5,80 €</a:t>
             </a:r>
           </a:p>
         </p:txBody>
@@ -14027,7 +14145,7 @@
         </p:nvSpPr>
         <p:spPr>
           <a:xfrm>
-            <a:off x="5038343" y="5641848"/>
+            <a:off x="5038343" y="6154377"/>
             <a:ext cx="1878482" cy="142430"/>
           </a:xfrm>
           <a:prstGeom prst="rect">
@@ -14074,8 +14192,8 @@
         </p:nvSpPr>
         <p:spPr>
           <a:xfrm>
-            <a:off x="7154569" y="4965192"/>
-            <a:ext cx="2134514" cy="1088136"/>
+            <a:off x="7154569" y="5477721"/>
+            <a:ext cx="2134514" cy="575607"/>
           </a:xfrm>
           <a:prstGeom prst="rect">
             <a:avLst/>
@@ -14120,7 +14238,7 @@
         </p:nvSpPr>
         <p:spPr>
           <a:xfrm>
-            <a:off x="7282585" y="5093208"/>
+            <a:off x="7282585" y="5605737"/>
             <a:ext cx="1878482" cy="130048"/>
           </a:xfrm>
           <a:prstGeom prst="rect">
@@ -14167,7 +14285,7 @@
         </p:nvSpPr>
         <p:spPr>
           <a:xfrm>
-            <a:off x="7282585" y="5330952"/>
+            <a:off x="7282585" y="5843481"/>
             <a:ext cx="1878482" cy="221487"/>
           </a:xfrm>
           <a:prstGeom prst="rect">
@@ -14214,7 +14332,7 @@
         </p:nvSpPr>
         <p:spPr>
           <a:xfrm>
-            <a:off x="7282585" y="5641848"/>
+            <a:off x="7282585" y="6154377"/>
             <a:ext cx="1878482" cy="142430"/>
           </a:xfrm>
           <a:prstGeom prst="rect">
@@ -14261,8 +14379,8 @@
         </p:nvSpPr>
         <p:spPr>
           <a:xfrm>
-            <a:off x="9398811" y="4965192"/>
-            <a:ext cx="2134514" cy="1088136"/>
+            <a:off x="9398811" y="5477721"/>
+            <a:ext cx="2134514" cy="575607"/>
           </a:xfrm>
           <a:prstGeom prst="rect">
             <a:avLst/>
@@ -14307,7 +14425,7 @@
         </p:nvSpPr>
         <p:spPr>
           <a:xfrm>
-            <a:off x="9526827" y="5093208"/>
+            <a:off x="9526827" y="5605737"/>
             <a:ext cx="1878482" cy="130048"/>
           </a:xfrm>
           <a:prstGeom prst="rect">
@@ -14354,7 +14472,7 @@
         </p:nvSpPr>
         <p:spPr>
           <a:xfrm>
-            <a:off x="9526827" y="5330952"/>
+            <a:off x="9526827" y="5843481"/>
             <a:ext cx="1878482" cy="221487"/>
           </a:xfrm>
           <a:prstGeom prst="rect">
@@ -14401,7 +14519,7 @@
         </p:nvSpPr>
         <p:spPr>
           <a:xfrm>
-            <a:off x="9526827" y="5641848"/>
+            <a:off x="9526827" y="6154377"/>
             <a:ext cx="1878482" cy="142430"/>
           </a:xfrm>
           <a:prstGeom prst="rect">
@@ -14493,7 +14611,7 @@
         <p:spPr>
           <a:xfrm>
             <a:off x="658368" y="6355080"/>
-            <a:ext cx="10874959" cy="163067"/>
+            <a:ext cx="10874959" cy="307848"/>
           </a:xfrm>
           <a:prstGeom prst="rect">
             <a:avLst/>
@@ -14526,7 +14644,31 @@
                 <a:cs typeface="Manrope"/>
                 <a:ea typeface="Manrope"/>
               </a:rPr>
-              <a:t>Горизонт 30 дней. Сумма по четырём продлениям: 0,32 + 0,77 + 1,57 + 3,08 = 5,74 €. Оценка не является гарантированным прогнозом потерь.</a:t>
+              <a:t>Горизонт 30 дней. Четыре продления в горизонте стоят 0,95 + 2,34 + 5,47 + 8,27 = 17,03 €; из них под риском 0,36 + 0,70 + 1,81 + 2,93 = 5,80 €. Оценка не является гарантированным</a:t>
+            </a:r>
+          </a:p>
+          <a:p>
+            <a:pPr algn="l">
+              <a:lnSpc>
+                <a:spcPct val="120000"/>
+              </a:lnSpc>
+              <a:spcBef>
+                <a:spcPts val="0"/>
+              </a:spcBef>
+              <a:spcAft>
+                <a:spcPts val="0"/>
+              </a:spcAft>
+            </a:pPr>
+            <a:r>
+              <a:rPr sz="950" b="0" i="0">
+                <a:solidFill>
+                  <a:srgbClr val="666666"/>
+                </a:solidFill>
+                <a:latin typeface="Manrope"/>
+                <a:cs typeface="Manrope"/>
+                <a:ea typeface="Manrope"/>
+              </a:rPr>
+              <a:t>прогнозом потерь.</a:t>
             </a:r>
           </a:p>
         </p:txBody>
@@ -15009,7 +15151,7 @@
         <p:spPr>
           <a:xfrm>
             <a:off x="626364" y="2921508"/>
-            <a:ext cx="5346039" cy="1978550"/>
+            <a:ext cx="5346039" cy="531102"/>
           </a:xfrm>
           <a:prstGeom prst="rect">
             <a:avLst/>
@@ -15063,7 +15205,7 @@
         <p:spPr>
           <a:xfrm>
             <a:off x="658368" y="2953512"/>
-            <a:ext cx="5282031" cy="1900950"/>
+            <a:ext cx="5282031" cy="467094"/>
           </a:xfrm>
           <a:prstGeom prst="rect">
             <a:avLst/>
@@ -15079,7 +15221,7 @@
         <p:spPr>
           <a:xfrm>
             <a:off x="6219291" y="2921508"/>
-            <a:ext cx="5346039" cy="1978550"/>
+            <a:ext cx="5346039" cy="531102"/>
           </a:xfrm>
           <a:prstGeom prst="rect">
             <a:avLst/>
@@ -15133,7 +15275,7 @@
         <p:spPr>
           <a:xfrm>
             <a:off x="6251295" y="2953512"/>
-            <a:ext cx="5282031" cy="1900950"/>
+            <a:ext cx="3666512" cy="467094"/>
           </a:xfrm>
           <a:prstGeom prst="rect">
             <a:avLst/>
@@ -15275,7 +15417,7 @@
                 <a:cs typeface="Manrope Medium"/>
                 <a:ea typeface="Manrope Medium"/>
               </a:rPr>
-              <a:t>73,3</a:t>
+              <a:t>71,4</a:t>
             </a:r>
             <a:r>
               <a:rPr sz="1500" b="0">
@@ -15297,7 +15439,7 @@
                 <a:cs typeface="Manrope"/>
                 <a:ea typeface="Manrope"/>
               </a:rPr>
-              <a:t>81,0</a:t>
+              <a:t>81,8</a:t>
             </a:r>
           </a:p>
         </p:txBody>
@@ -15437,7 +15579,7 @@
                 <a:cs typeface="Manrope Medium"/>
                 <a:ea typeface="Manrope Medium"/>
               </a:rPr>
-              <a:t>73,3</a:t>
+              <a:t>71,4</a:t>
             </a:r>
             <a:r>
               <a:rPr sz="1500" b="0">
@@ -15459,7 +15601,7 @@
                 <a:cs typeface="Manrope"/>
                 <a:ea typeface="Manrope"/>
               </a:rPr>
-              <a:t>81,0</a:t>
+              <a:t>81,8</a:t>
             </a:r>
           </a:p>
         </p:txBody>
@@ -15552,7 +15694,7 @@
                 <a:cs typeface="Manrope SemiBold"/>
                 <a:ea typeface="Manrope SemiBold"/>
               </a:rPr>
-              <a:t>Клиентов высокого риска</a:t>
+              <a:t>Услуг высокого риска</a:t>
             </a:r>
           </a:p>
         </p:txBody>
@@ -15599,7 +15741,7 @@
                 <a:cs typeface="Manrope Medium"/>
                 <a:ea typeface="Manrope Medium"/>
               </a:rPr>
-              <a:t>2</a:t>
+              <a:t>4</a:t>
             </a:r>
             <a:r>
               <a:rPr sz="1500" b="0">
@@ -15621,7 +15763,7 @@
                 <a:cs typeface="Manrope"/>
                 <a:ea typeface="Manrope"/>
               </a:rPr>
-              <a:t>3</a:t>
+              <a:t>7</a:t>
             </a:r>
           </a:p>
         </p:txBody>
@@ -15714,7 +15856,7 @@
                 <a:cs typeface="Manrope SemiBold"/>
                 <a:ea typeface="Manrope SemiBold"/>
               </a:rPr>
-              <a:t>Клиентов среднего риска</a:t>
+              <a:t>Выручка под риском</a:t>
             </a:r>
           </a:p>
         </p:txBody>
@@ -15761,7 +15903,7 @@
                 <a:cs typeface="Manrope Medium"/>
                 <a:ea typeface="Manrope Medium"/>
               </a:rPr>
-              <a:t>4</a:t>
+              <a:t>5,80 €</a:t>
             </a:r>
             <a:r>
               <a:rPr sz="1500" b="0">
@@ -15783,7 +15925,7 @@
                 <a:cs typeface="Manrope"/>
                 <a:ea typeface="Manrope"/>
               </a:rPr>
-              <a:t>3</a:t>
+              <a:t>7,72 €</a:t>
             </a:r>
           </a:p>
         </p:txBody>
@@ -15876,7 +16018,7 @@
                 <a:cs typeface="Manrope SemiBold"/>
                 <a:ea typeface="Manrope SemiBold"/>
               </a:rPr>
-              <a:t>Выручка под риском</a:t>
+              <a:t>Сумма весов по услуге</a:t>
             </a:r>
           </a:p>
         </p:txBody>
@@ -15923,7 +16065,7 @@
                 <a:cs typeface="Manrope Medium"/>
                 <a:ea typeface="Manrope Medium"/>
               </a:rPr>
-              <a:t>5,74 €</a:t>
+              <a:t>10,5</a:t>
             </a:r>
             <a:r>
               <a:rPr sz="1500" b="0">
@@ -15945,7 +16087,7 @@
                 <a:cs typeface="Manrope"/>
                 <a:ea typeface="Manrope"/>
               </a:rPr>
-              <a:t>7,48 €</a:t>
+              <a:t>16,5</a:t>
             </a:r>
           </a:p>
         </p:txBody>
@@ -16038,7 +16180,7 @@
                 <a:cs typeface="Manrope SemiBold"/>
                 <a:ea typeface="Manrope SemiBold"/>
               </a:rPr>
-              <a:t>Сумма весов</a:t>
+              <a:t>Сумма весов модели</a:t>
             </a:r>
           </a:p>
         </p:txBody>
@@ -16085,7 +16227,7 @@
                 <a:cs typeface="Manrope Medium"/>
                 <a:ea typeface="Manrope Medium"/>
               </a:rPr>
-              <a:t>15,0</a:t>
+              <a:t>13,0</a:t>
             </a:r>
             <a:r>
               <a:rPr sz="1500" b="0">
@@ -16107,7 +16249,7 @@
                 <a:cs typeface="Manrope"/>
                 <a:ea typeface="Manrope"/>
               </a:rPr>
-              <a:t>21,0</a:t>
+              <a:t>19,0</a:t>
             </a:r>
           </a:p>
         </p:txBody>
@@ -16121,7 +16263,7 @@
         <p:spPr>
           <a:xfrm>
             <a:off x="658368" y="5641848"/>
-            <a:ext cx="10874959" cy="364998"/>
+            <a:ext cx="10874959" cy="538353"/>
           </a:xfrm>
           <a:prstGeom prst="rect">
             <a:avLst/>
@@ -16154,7 +16296,7 @@
                 <a:cs typeface="Manrope"/>
                 <a:ea typeface="Manrope"/>
               </a:rPr>
-              <a:t>Расчёт: сумма весов выросла с 15,0 до 21,0, вклад фактора — с 3,0 до 9,0, поэтому 100 × 17,0 / 21,0 = 81,0. Настройка сохраняется на сервере, сводка обновляется сразу, без</a:t>
+              <a:t>Расчёт: по service-0030 сумма весов выросла с 10,5 до 16,5, вклад фактора — с 3,0 до 9,0, поэтому 100 × 13,5 / 16,5 = 81,8. Категории клиентов (3 высокий / 3 средний) не сдвинулись:</a:t>
             </a:r>
           </a:p>
           <a:p>
@@ -16178,7 +16320,31 @@
                 <a:cs typeface="Manrope"/>
                 <a:ea typeface="Manrope"/>
               </a:rPr>
-              <a:t>перезагрузки страницы; кнопка «Значения по умолчанию» возвращает исходные 3,0 и прежние числа.</a:t>
+              <a:t>вес усилил сигналы, но не перевёл никого через порог. Настройка сохраняется на сервере, сводка обновляется сразу, без перезагрузки страницы; кнопка «Значения по</a:t>
+            </a:r>
+          </a:p>
+          <a:p>
+            <a:pPr algn="l">
+              <a:lnSpc>
+                <a:spcPct val="130000"/>
+              </a:lnSpc>
+              <a:spcBef>
+                <a:spcPts val="0"/>
+              </a:spcBef>
+              <a:spcAft>
+                <a:spcPts val="0"/>
+              </a:spcAft>
+            </a:pPr>
+            <a:r>
+              <a:rPr sz="1050" b="0" i="0">
+                <a:solidFill>
+                  <a:srgbClr val="666666"/>
+                </a:solidFill>
+                <a:latin typeface="Manrope"/>
+                <a:cs typeface="Manrope"/>
+                <a:ea typeface="Manrope"/>
+              </a:rPr>
+              <a:t>умолчанию» возвращает исходные 3,0 и прежние числа.</a:t>
             </a:r>
           </a:p>
         </p:txBody>

--- a/aeza_hackathon_osen_2026.pptx
+++ b/aeza_hackathon_osen_2026.pptx
@@ -147,58 +147,46 @@
           </c:spPr>
           <c:cat>
             <c:strRef>
-              <c:f>Sheet1!$A$2:$A$8</c:f>
+              <c:f>Sheet1!$A$2:$A$6</c:f>
               <c:strCache>
-                <c:ptCount val="7"/>
+                <c:ptCount val="5"/>
                 <c:pt idx="0">
                   <c:v>Близость даты окончания · 3,0</c:v>
                 </c:pt>
                 <c:pt idx="1">
+                  <c:v>Автопродление отключено · 2,0</c:v>
+                </c:pt>
+                <c:pt idx="2">
+                  <c:v>Недостаточно средств для продления · 2,0</c:v>
+                </c:pt>
+                <c:pt idx="3">
                   <c:v>Ожидание продления · 2,5</c:v>
                 </c:pt>
-                <c:pt idx="2">
-                  <c:v>Автопродление отключено · 2,0</c:v>
-                </c:pt>
-                <c:pt idx="3">
-                  <c:v>Неуспешные продления · 2,0</c:v>
-                </c:pt>
                 <c:pt idx="4">
-                  <c:v>Доля неуспешных продлений · 1,5</c:v>
-                </c:pt>
-                <c:pt idx="5">
-                  <c:v>Недостаточно средств · 2,0</c:v>
-                </c:pt>
-                <c:pt idx="6">
-                  <c:v>Услуга приостановлена · 2,0</c:v>
+                  <c:v>Услуга приостановлена · 1,0</c:v>
                 </c:pt>
               </c:strCache>
             </c:strRef>
           </c:cat>
           <c:val>
             <c:numRef>
-              <c:f>Sheet1!$B$2:$B$8</c:f>
+              <c:f>Sheet1!$B$2:$B$6</c:f>
               <c:numCache>
                 <c:formatCode>General</c:formatCode>
-                <c:ptCount val="7"/>
+                <c:ptCount val="5"/>
                 <c:pt idx="0">
                   <c:v>3.0</c:v>
                 </c:pt>
                 <c:pt idx="1">
+                  <c:v>2.0</c:v>
+                </c:pt>
+                <c:pt idx="2">
+                  <c:v>0.0</c:v>
+                </c:pt>
+                <c:pt idx="3">
                   <c:v>2.5</c:v>
                 </c:pt>
-                <c:pt idx="2">
-                  <c:v>2.0</c:v>
-                </c:pt>
-                <c:pt idx="3">
-                  <c:v>2.0</c:v>
-                </c:pt>
                 <c:pt idx="4">
-                  <c:v>1.5</c:v>
-                </c:pt>
-                <c:pt idx="5">
-                  <c:v>0.0</c:v>
-                </c:pt>
-                <c:pt idx="6">
                   <c:v>0.0</c:v>
                 </c:pt>
               </c:numCache>
@@ -1064,7 +1052,7 @@
           </a:p>
           <a:p>
             <a:r>
-              <a:t>строку user-0010@example.test — верхняя, балл 73,3), справа сводные метрики и блок</a:t>
+              <a:t>строку user-0010@example.test — верхняя, балл 71,4), справа сводные метрики и блок</a:t>
             </a:r>
           </a:p>
           <a:p>
@@ -1164,7 +1152,7 @@
           </a:p>
           <a:p>
             <a:r>
-              <a:t>клиент #10, балл 73,3 из 100, категория «высокий». Выбираем его не случайно —</a:t>
+              <a:t>клиент #10, балл 71,4 из 100, категория «высокий». Выбираем его не случайно —</a:t>
             </a:r>
           </a:p>
           <a:p>
@@ -1179,7 +1167,7 @@
           </a:p>
           <a:p>
             <a:r>
-              <a:t>баланс 203,79 €, всего пополнено 4 206,69 €. Выручка под риском — ноль,</a:t>
+              <a:t>баланс 203,79 €, всего пополнено 4 206,69 €. Выручка под риском — ноль,</a:t>
             </a:r>
           </a:p>
           <a:p>
@@ -1205,7 +1193,7 @@
           </a:p>
           <a:p>
             <a:r>
-              <a:t>Возможный вопрос: «Почему балл клиента 73,3, а не среднее по услугам?» —</a:t>
+              <a:t>Возможный вопрос: «Почему балл клиента 71,4, а не среднее по услугам?» —</a:t>
             </a:r>
           </a:p>
           <a:p>
@@ -1300,22 +1288,27 @@
           </a:p>
           <a:p>
             <a:r>
-              <a:t>сумму вес×значение, делить на сумму весов. По этой услуге сумма вкладов 11 из 15 —</a:t>
-            </a:r>
-          </a:p>
-          <a:p>
-            <a:r>
-              <a:t>отсюда 73,3.</a:t>
-            </a:r>
-          </a:p>
-          <a:p>
-            <a:r>
-              <a:t>Крупнейшие вклады: близость даты окончания — 3,0, ожидание продления — 2,5,</a:t>
-            </a:r>
-          </a:p>
-          <a:p>
-            <a:r>
-              <a:t>автопродление и неуспешные продления — по 2,0.</a:t>
+              <a:t>сумму вес×значение, делить на сумму весов. По этой услуге сумма вкладов</a:t>
+            </a:r>
+          </a:p>
+          <a:p>
+            <a:r>
+              <a:t>7,5 из 10,5 — отсюда 71,4.</a:t>
+            </a:r>
+          </a:p>
+          <a:p>
+            <a:r>
+              <a:t>Крупнейшие вклады: близость даты окончания — 3.0,</a:t>
+            </a:r>
+          </a:p>
+          <a:p>
+            <a:r>
+              <a:t>ожидание продления — 2.5,</a:t>
+            </a:r>
+          </a:p>
+          <a:p>
+            <a:r>
+              <a:t>автопродление отключено — 2.0.</a:t>
             </a:r>
           </a:p>
           <a:p>
@@ -1431,7 +1424,7 @@
           </a:p>
           <a:p>
             <a:r>
-              <a:t>«Здесь важно не сложить несопоставимое. У клиента #10 балл высокий — 73,3,</a:t>
+              <a:t>«Здесь важно не сложить несопоставимое. У клиента #10 балл высокий — 71,4,</a:t>
             </a:r>
           </a:p>
           <a:p>
@@ -1451,7 +1444,7 @@
           </a:p>
           <a:p>
             <a:r>
-              <a:t>Баланс 203,79 € и пополнения 4 206,69 € — это не потерянные деньги. Мы держим</a:t>
+              <a:t>Баланс 203,79 € и пополнения 4 206,69 € — это не потерянные деньги. Мы держим</a:t>
             </a:r>
           </a:p>
           <a:p>
@@ -1582,12 +1575,12 @@
           </a:p>
           <a:p>
             <a:r>
-              <a:t>Смотрите, что произошло. Балл клиента #10: 73,3 → 81,0. Клиентов высокого риска:</a:t>
-            </a:r>
-          </a:p>
-          <a:p>
-            <a:r>
-              <a:t>2 → 3, среднего: 4 → 3. Выручка под риском: 5,74 → 7,48 €.</a:t>
+              <a:t>Смотрите, что произошло. Балл клиента #10: 71,4 → 81,8. Клиентов высокого риска:</a:t>
+            </a:r>
+          </a:p>
+          <a:p>
+            <a:r>
+              <a:t>3 → 3, среднего: 3 → 3. Выручка под риском: 5,80 → 7,72 €.</a:t>
             </a:r>
           </a:p>
           <a:p>
@@ -1608,12 +1601,12 @@
           </a:p>
           <a:p>
             <a:r>
-              <a:t>обновляется на месте, без перезагрузки: 2 → 3 высокого, 4 → 3 среднего, 5,74 → 7,48 €,</a:t>
-            </a:r>
-          </a:p>
-          <a:p>
-            <a:r>
-              <a:t>сумма весов 15,0 → 21,0. Затем открыть карточку клиента #10 (балл 81,0) и вернуться</a:t>
+              <a:t>обновляется на месте, без перезагрузки: выручка 5,80 → 7,72 €,</a:t>
+            </a:r>
+          </a:p>
+          <a:p>
+            <a:r>
+              <a:t>сумма весов 13.0 → 19.0. Затем открыть карточку клиента #10 (балл 81,8) и вернуться</a:t>
             </a:r>
           </a:p>
           <a:p>
@@ -9946,7 +9939,7 @@
         <p:spPr>
           <a:xfrm>
             <a:off x="658368" y="3044952"/>
-            <a:ext cx="6487678" cy="2354051"/>
+            <a:ext cx="5537588" cy="2354051"/>
           </a:xfrm>
           <a:prstGeom prst="rect">
             <a:avLst/>
@@ -10110,7 +10103,7 @@
         <p:spPr>
           <a:xfrm>
             <a:off x="7424928" y="3044952"/>
-            <a:ext cx="4093728" cy="1282231"/>
+            <a:ext cx="4108399" cy="458069"/>
           </a:xfrm>
           <a:prstGeom prst="rect">
             <a:avLst/>
@@ -10180,7 +10173,7 @@
         <p:spPr>
           <a:xfrm>
             <a:off x="7424928" y="4528351"/>
-            <a:ext cx="4101909" cy="1233716"/>
+            <a:ext cx="4108399" cy="981577"/>
           </a:xfrm>
           <a:prstGeom prst="rect">
             <a:avLst/>
@@ -10409,7 +10402,7 @@
                 <a:cs typeface="Manrope"/>
                 <a:ea typeface="Manrope"/>
               </a:rPr>
-              <a:t>Клиент #10 — высокий риск, 73,3 из 100</a:t>
+              <a:t>Клиент #10 — высокий риск, 71,4 из 100</a:t>
             </a:r>
           </a:p>
         </p:txBody>
@@ -10781,7 +10774,7 @@
                 <a:cs typeface="Manrope SemiBold"/>
                 <a:ea typeface="Manrope SemiBold"/>
               </a:rPr>
-              <a:t>73,3 / 100</a:t>
+              <a:t>71,4 / 100</a:t>
             </a:r>
           </a:p>
         </p:txBody>
@@ -11272,7 +11265,7 @@
         <p:spPr>
           <a:xfrm>
             <a:off x="4791456" y="2295144"/>
-            <a:ext cx="6671647" cy="346003"/>
+            <a:ext cx="6405491" cy="346003"/>
           </a:xfrm>
           <a:prstGeom prst="rect">
             <a:avLst/>
@@ -11342,7 +11335,7 @@
         <p:spPr>
           <a:xfrm>
             <a:off x="4791456" y="2750875"/>
-            <a:ext cx="3297783" cy="1186839"/>
+            <a:ext cx="3114365" cy="1186850"/>
           </a:xfrm>
           <a:prstGeom prst="rect">
             <a:avLst/>
@@ -11412,7 +11405,7 @@
         <p:spPr>
           <a:xfrm>
             <a:off x="8235543" y="2750875"/>
-            <a:ext cx="3297783" cy="1186839"/>
+            <a:ext cx="3114365" cy="1186850"/>
           </a:xfrm>
           <a:prstGeom prst="rect">
             <a:avLst/>
@@ -11529,7 +11522,7 @@
         <p:spPr>
           <a:xfrm>
             <a:off x="4791456" y="4422357"/>
-            <a:ext cx="6697172" cy="1449771"/>
+            <a:ext cx="6741871" cy="631621"/>
           </a:xfrm>
           <a:prstGeom prst="rect">
             <a:avLst/>
@@ -11896,7 +11889,7 @@
                 <a:cs typeface="Manrope"/>
                 <a:ea typeface="Manrope"/>
               </a:rPr>
-              <a:t>Формула: 100 × Σ(вес × значение) / Σвес. По service-0030 сумма вкладов 11,00 при сумме весов 15,0 → 73,3. Ниже — фактические</a:t>
+              <a:t>Формула: 100 × Σ(вес × значение) / Σвес. По service-0030 балл 71,4 при сумме весов 13.0. Ниже — фактические вклады из</a:t>
             </a:r>
           </a:p>
           <a:p>
@@ -11920,7 +11913,7 @@
                 <a:cs typeface="Manrope"/>
                 <a:ea typeface="Manrope"/>
               </a:rPr>
-              <a:t>вклады из интерфейса.</a:t>
+              <a:t>интерфейса.</a:t>
             </a:r>
           </a:p>
         </p:txBody>
@@ -12013,7 +12006,7 @@
                 <a:cs typeface="Manrope SemiBold"/>
                 <a:ea typeface="Manrope SemiBold"/>
               </a:rPr>
-              <a:t>Вклад факторов в балл 73,3 · service-0030</a:t>
+              <a:t>Вклад факторов в балл 71,4 · service-0030</a:t>
             </a:r>
           </a:p>
         </p:txBody>
@@ -12598,7 +12591,7 @@
         <p:spPr>
           <a:xfrm>
             <a:off x="7123176" y="5200564"/>
-            <a:ext cx="4208983" cy="505968"/>
+            <a:ext cx="4208983" cy="343408"/>
           </a:xfrm>
           <a:prstGeom prst="rect">
             <a:avLst/>
@@ -12631,7 +12624,7 @@
                 <a:cs typeface="Manrope"/>
                 <a:ea typeface="Manrope"/>
               </a:rPr>
-              <a:t>Три крупнейших фактора дают 3,0 + 2,5 + 2,0 = 7,5 из 15,0. С</a:t>
+              <a:t>Три крупнейших фактора дают 3,0 + 2,5 + 2,0 = 7,5 из 10,5. Сумма</a:t>
             </a:r>
           </a:p>
           <a:p>
@@ -12655,31 +12648,7 @@
                 <a:cs typeface="Manrope"/>
                 <a:ea typeface="Manrope"/>
               </a:rPr>
-              <a:t>неуспешными продлениями и их долей (2,0 + 1,5) сумма вкладов 11,0</a:t>
-            </a:r>
-          </a:p>
-          <a:p>
-            <a:pPr algn="l">
-              <a:lnSpc>
-                <a:spcPct val="128000"/>
-              </a:lnSpc>
-              <a:spcBef>
-                <a:spcPts val="0"/>
-              </a:spcBef>
-              <a:spcAft>
-                <a:spcPts val="0"/>
-              </a:spcAft>
-            </a:pPr>
-            <a:r>
-              <a:rPr sz="1000" b="0" i="0">
-                <a:solidFill>
-                  <a:srgbClr val="666666"/>
-                </a:solidFill>
-                <a:latin typeface="Manrope"/>
-                <a:cs typeface="Manrope"/>
-                <a:ea typeface="Manrope"/>
-              </a:rPr>
-              <a:t>из 15,0 — отсюда 73,3, выше порога 65.</a:t>
+              <a:t>вкладов 7,5 из 10,5 — отсюда 71,4, выше порога 65.</a:t>
             </a:r>
           </a:p>
         </p:txBody>
@@ -13381,7 +13350,7 @@
                 <a:cs typeface="Manrope SemiBold"/>
                 <a:ea typeface="Manrope SemiBold"/>
               </a:rPr>
-              <a:t>73,3 / 100</a:t>
+              <a:t>71,4 / 100</a:t>
             </a:r>
           </a:p>
         </p:txBody>
@@ -13872,7 +13841,7 @@
         <p:spPr>
           <a:xfrm>
             <a:off x="4910327" y="3355848"/>
-            <a:ext cx="6615883" cy="1398821"/>
+            <a:ext cx="6255671" cy="1398821"/>
           </a:xfrm>
           <a:prstGeom prst="rect">
             <a:avLst/>
@@ -14014,7 +13983,7 @@
                 <a:cs typeface="Manrope"/>
                 <a:ea typeface="Manrope"/>
               </a:rPr>
-              <a:t>5,74 €</a:t>
+              <a:t>5,80 €</a:t>
             </a:r>
           </a:p>
         </p:txBody>
@@ -14388,7 +14357,7 @@
                 <a:cs typeface="Manrope"/>
                 <a:ea typeface="Manrope"/>
               </a:rPr>
-              <a:t>22 240,73 €</a:t>
+              <a:t>22 240,73 €</a:t>
             </a:r>
           </a:p>
         </p:txBody>
@@ -14526,7 +14495,7 @@
                 <a:cs typeface="Manrope"/>
                 <a:ea typeface="Manrope"/>
               </a:rPr>
-              <a:t>Горизонт 30 дней. Сумма по четырём продлениям: 0,32 + 0,77 + 1,57 + 3,08 = 5,74 €. Оценка не является гарантированным прогнозом потерь.</a:t>
+              <a:t>Горизонт 30 дней. Сумма по четырём продлениям: 0,32 + 0,77 + 1,57 + 3,08 = 5,80 €. Оценка не является гарантированным прогнозом потерь.</a:t>
             </a:r>
           </a:p>
         </p:txBody>
@@ -15063,7 +15032,7 @@
         <p:spPr>
           <a:xfrm>
             <a:off x="658368" y="2953512"/>
-            <a:ext cx="5282031" cy="1900950"/>
+            <a:ext cx="5282031" cy="486502"/>
           </a:xfrm>
           <a:prstGeom prst="rect">
             <a:avLst/>
@@ -15133,7 +15102,7 @@
         <p:spPr>
           <a:xfrm>
             <a:off x="6251295" y="2953512"/>
-            <a:ext cx="5282031" cy="1900950"/>
+            <a:ext cx="5282031" cy="486502"/>
           </a:xfrm>
           <a:prstGeom prst="rect">
             <a:avLst/>
@@ -15275,7 +15244,7 @@
                 <a:cs typeface="Manrope Medium"/>
                 <a:ea typeface="Manrope Medium"/>
               </a:rPr>
-              <a:t>73,3</a:t>
+              <a:t>71,4</a:t>
             </a:r>
             <a:r>
               <a:rPr sz="1500" b="0">
@@ -15297,7 +15266,7 @@
                 <a:cs typeface="Manrope"/>
                 <a:ea typeface="Manrope"/>
               </a:rPr>
-              <a:t>81,0</a:t>
+              <a:t>81,8</a:t>
             </a:r>
           </a:p>
         </p:txBody>
@@ -15437,7 +15406,7 @@
                 <a:cs typeface="Manrope Medium"/>
                 <a:ea typeface="Manrope Medium"/>
               </a:rPr>
-              <a:t>73,3</a:t>
+              <a:t>71,4</a:t>
             </a:r>
             <a:r>
               <a:rPr sz="1500" b="0">
@@ -15459,7 +15428,7 @@
                 <a:cs typeface="Manrope"/>
                 <a:ea typeface="Manrope"/>
               </a:rPr>
-              <a:t>81,0</a:t>
+              <a:t>81,8</a:t>
             </a:r>
           </a:p>
         </p:txBody>
@@ -15923,7 +15892,7 @@
                 <a:cs typeface="Manrope Medium"/>
                 <a:ea typeface="Manrope Medium"/>
               </a:rPr>
-              <a:t>5,74 €</a:t>
+              <a:t>5,80 €</a:t>
             </a:r>
             <a:r>
               <a:rPr sz="1500" b="0">
@@ -15945,7 +15914,7 @@
                 <a:cs typeface="Manrope"/>
                 <a:ea typeface="Manrope"/>
               </a:rPr>
-              <a:t>7,48 €</a:t>
+              <a:t>7,72 €</a:t>
             </a:r>
           </a:p>
         </p:txBody>
@@ -16085,7 +16054,7 @@
                 <a:cs typeface="Manrope Medium"/>
                 <a:ea typeface="Manrope Medium"/>
               </a:rPr>
-              <a:t>15,0</a:t>
+              <a:t>13.0</a:t>
             </a:r>
             <a:r>
               <a:rPr sz="1500" b="0">
@@ -16107,7 +16076,7 @@
                 <a:cs typeface="Manrope"/>
                 <a:ea typeface="Manrope"/>
               </a:rPr>
-              <a:t>21,0</a:t>
+              <a:t>19.0</a:t>
             </a:r>
           </a:p>
         </p:txBody>
@@ -16154,7 +16123,7 @@
                 <a:cs typeface="Manrope"/>
                 <a:ea typeface="Manrope"/>
               </a:rPr>
-              <a:t>Расчёт: сумма весов выросла с 15,0 до 21,0, вклад фактора — с 3,0 до 9,0, поэтому 100 × 17,0 / 21,0 = 81,0. Настройка сохраняется на сервере, сводка обновляется сразу, без</a:t>
+              <a:t>Расчёт: сумма весов выросла с 13.0 до 19.0, вклад фактора — с 3.0 до 9.0, поэтому балл service-0030 стал 81,8. Настройка сохраняется на сервере, сводка обновляется сразу, без</a:t>
             </a:r>
           </a:p>
           <a:p>

--- a/aeza_hackathon_osen_2026.pptx
+++ b/aeza_hackathon_osen_2026.pptx
@@ -14495,7 +14495,7 @@
                 <a:cs typeface="Manrope"/>
                 <a:ea typeface="Manrope"/>
               </a:rPr>
-              <a:t>Горизонт 30 дней. Сумма по четырём продлениям: 0,32 + 0,77 + 1,57 + 3,08 = 5,80 €. Оценка не является гарантированным прогнозом потерь.</a:t>
+              <a:t>Горизонт 30 дней. Сумма по 4 продлениям: 0,36 + 0,70 + 1,81 + 2,93 = 5,80 €. Оценка не является гарантированным прогнозом потерь.</a:t>
             </a:r>
           </a:p>
         </p:txBody>
